--- a/Dokumenter/Powerpoint.pptx
+++ b/Dokumenter/Powerpoint.pptx
@@ -4,14 +4,21 @@
   <p:sldMasterIdLst>
     <p:sldMasterId id="2147483660" r:id="rId1"/>
   </p:sldMasterIdLst>
+  <p:notesMasterIdLst>
+    <p:notesMasterId r:id="rId13"/>
+  </p:notesMasterIdLst>
   <p:sldIdLst>
     <p:sldId id="256" r:id="rId2"/>
-    <p:sldId id="257" r:id="rId3"/>
-    <p:sldId id="258" r:id="rId4"/>
-    <p:sldId id="259" r:id="rId5"/>
-    <p:sldId id="260" r:id="rId6"/>
-    <p:sldId id="261" r:id="rId7"/>
-    <p:sldId id="262" r:id="rId8"/>
+    <p:sldId id="265" r:id="rId3"/>
+    <p:sldId id="257" r:id="rId4"/>
+    <p:sldId id="263" r:id="rId5"/>
+    <p:sldId id="258" r:id="rId6"/>
+    <p:sldId id="264" r:id="rId7"/>
+    <p:sldId id="259" r:id="rId8"/>
+    <p:sldId id="260" r:id="rId9"/>
+    <p:sldId id="261" r:id="rId10"/>
+    <p:sldId id="262" r:id="rId11"/>
+    <p:sldId id="266" r:id="rId12"/>
   </p:sldIdLst>
   <p:sldSz cx="12192000" cy="6858000"/>
   <p:notesSz cx="6858000" cy="9144000"/>
@@ -110,7 +117,1157 @@
       </a:defRPr>
     </a:lvl9pPr>
   </p:defaultTextStyle>
+  <p:extLst>
+    <p:ext uri="{EFAFB233-063F-42B5-8137-9DF3F51BA10A}">
+      <p15:sldGuideLst xmlns:p15="http://schemas.microsoft.com/office/powerpoint/2012/main"/>
+    </p:ext>
+  </p:extLst>
 </p:presentation>
+</file>
+
+<file path=ppt/notesMasters/notesMaster1.xml><?xml version="1.0" encoding="utf-8"?>
+<p:notesMaster xmlns:a="http://schemas.openxmlformats.org/drawingml/2006/main" xmlns:r="http://schemas.openxmlformats.org/officeDocument/2006/relationships" xmlns:p="http://schemas.openxmlformats.org/presentationml/2006/main">
+  <p:cSld>
+    <p:bg>
+      <p:bgRef idx="1001">
+        <a:schemeClr val="bg1"/>
+      </p:bgRef>
+    </p:bg>
+    <p:spTree>
+      <p:nvGrpSpPr>
+        <p:cNvPr id="1" name=""/>
+        <p:cNvGrpSpPr/>
+        <p:nvPr/>
+      </p:nvGrpSpPr>
+      <p:grpSpPr>
+        <a:xfrm>
+          <a:off x="0" y="0"/>
+          <a:ext cx="0" cy="0"/>
+          <a:chOff x="0" y="0"/>
+          <a:chExt cx="0" cy="0"/>
+        </a:xfrm>
+      </p:grpSpPr>
+      <p:sp>
+        <p:nvSpPr>
+          <p:cNvPr id="2" name="Pladsholder til sidehoved 1"/>
+          <p:cNvSpPr>
+            <a:spLocks noGrp="1"/>
+          </p:cNvSpPr>
+          <p:nvPr>
+            <p:ph type="hdr" sz="quarter"/>
+          </p:nvPr>
+        </p:nvSpPr>
+        <p:spPr>
+          <a:xfrm>
+            <a:off x="0" y="0"/>
+            <a:ext cx="2971800" cy="458788"/>
+          </a:xfrm>
+          <a:prstGeom prst="rect">
+            <a:avLst/>
+          </a:prstGeom>
+        </p:spPr>
+        <p:txBody>
+          <a:bodyPr vert="horz" lIns="91440" tIns="45720" rIns="91440" bIns="45720" rtlCol="0"/>
+          <a:lstStyle>
+            <a:lvl1pPr algn="l">
+              <a:defRPr sz="1200"/>
+            </a:lvl1pPr>
+          </a:lstStyle>
+          <a:p>
+            <a:endParaRPr lang="da-DK"/>
+          </a:p>
+        </p:txBody>
+      </p:sp>
+      <p:sp>
+        <p:nvSpPr>
+          <p:cNvPr id="3" name="Pladsholder til dato 2"/>
+          <p:cNvSpPr>
+            <a:spLocks noGrp="1"/>
+          </p:cNvSpPr>
+          <p:nvPr>
+            <p:ph type="dt" idx="1"/>
+          </p:nvPr>
+        </p:nvSpPr>
+        <p:spPr>
+          <a:xfrm>
+            <a:off x="3884613" y="0"/>
+            <a:ext cx="2971800" cy="458788"/>
+          </a:xfrm>
+          <a:prstGeom prst="rect">
+            <a:avLst/>
+          </a:prstGeom>
+        </p:spPr>
+        <p:txBody>
+          <a:bodyPr vert="horz" lIns="91440" tIns="45720" rIns="91440" bIns="45720" rtlCol="0"/>
+          <a:lstStyle>
+            <a:lvl1pPr algn="r">
+              <a:defRPr sz="1200"/>
+            </a:lvl1pPr>
+          </a:lstStyle>
+          <a:p>
+            <a:fld id="{4811CEB2-C201-40D6-98C8-E1936CCEC6C1}" type="datetimeFigureOut">
+              <a:rPr lang="da-DK" smtClean="0"/>
+              <a:t>15-06-2026</a:t>
+            </a:fld>
+            <a:endParaRPr lang="da-DK"/>
+          </a:p>
+        </p:txBody>
+      </p:sp>
+      <p:sp>
+        <p:nvSpPr>
+          <p:cNvPr id="4" name="Pladsholder til slidebillede 3"/>
+          <p:cNvSpPr>
+            <a:spLocks noGrp="1" noRot="1" noChangeAspect="1"/>
+          </p:cNvSpPr>
+          <p:nvPr>
+            <p:ph type="sldImg" idx="2"/>
+          </p:nvPr>
+        </p:nvSpPr>
+        <p:spPr>
+          <a:xfrm>
+            <a:off x="685800" y="1143000"/>
+            <a:ext cx="5486400" cy="3086100"/>
+          </a:xfrm>
+          <a:prstGeom prst="rect">
+            <a:avLst/>
+          </a:prstGeom>
+          <a:noFill/>
+          <a:ln w="12700">
+            <a:solidFill>
+              <a:prstClr val="black"/>
+            </a:solidFill>
+          </a:ln>
+        </p:spPr>
+        <p:txBody>
+          <a:bodyPr vert="horz" lIns="91440" tIns="45720" rIns="91440" bIns="45720" rtlCol="0" anchor="ctr"/>
+          <a:lstStyle/>
+          <a:p>
+            <a:endParaRPr lang="da-DK"/>
+          </a:p>
+        </p:txBody>
+      </p:sp>
+      <p:sp>
+        <p:nvSpPr>
+          <p:cNvPr id="5" name="Pladsholder til noter 4"/>
+          <p:cNvSpPr>
+            <a:spLocks noGrp="1"/>
+          </p:cNvSpPr>
+          <p:nvPr>
+            <p:ph type="body" sz="quarter" idx="3"/>
+          </p:nvPr>
+        </p:nvSpPr>
+        <p:spPr>
+          <a:xfrm>
+            <a:off x="685800" y="4400550"/>
+            <a:ext cx="5486400" cy="3600450"/>
+          </a:xfrm>
+          <a:prstGeom prst="rect">
+            <a:avLst/>
+          </a:prstGeom>
+        </p:spPr>
+        <p:txBody>
+          <a:bodyPr vert="horz" lIns="91440" tIns="45720" rIns="91440" bIns="45720" rtlCol="0"/>
+          <a:lstStyle/>
+          <a:p>
+            <a:pPr lvl="0"/>
+            <a:r>
+              <a:rPr lang="da-DK"/>
+              <a:t>Klik for at redigere teksttypografierne i masteren</a:t>
+            </a:r>
+          </a:p>
+          <a:p>
+            <a:pPr lvl="1"/>
+            <a:r>
+              <a:rPr lang="da-DK"/>
+              <a:t>Andet niveau</a:t>
+            </a:r>
+          </a:p>
+          <a:p>
+            <a:pPr lvl="2"/>
+            <a:r>
+              <a:rPr lang="da-DK"/>
+              <a:t>Tredje niveau</a:t>
+            </a:r>
+          </a:p>
+          <a:p>
+            <a:pPr lvl="3"/>
+            <a:r>
+              <a:rPr lang="da-DK"/>
+              <a:t>Fjerde niveau</a:t>
+            </a:r>
+          </a:p>
+          <a:p>
+            <a:pPr lvl="4"/>
+            <a:r>
+              <a:rPr lang="da-DK"/>
+              <a:t>Femte niveau</a:t>
+            </a:r>
+          </a:p>
+        </p:txBody>
+      </p:sp>
+      <p:sp>
+        <p:nvSpPr>
+          <p:cNvPr id="6" name="Pladsholder til sidefod 5"/>
+          <p:cNvSpPr>
+            <a:spLocks noGrp="1"/>
+          </p:cNvSpPr>
+          <p:nvPr>
+            <p:ph type="ftr" sz="quarter" idx="4"/>
+          </p:nvPr>
+        </p:nvSpPr>
+        <p:spPr>
+          <a:xfrm>
+            <a:off x="0" y="8685213"/>
+            <a:ext cx="2971800" cy="458787"/>
+          </a:xfrm>
+          <a:prstGeom prst="rect">
+            <a:avLst/>
+          </a:prstGeom>
+        </p:spPr>
+        <p:txBody>
+          <a:bodyPr vert="horz" lIns="91440" tIns="45720" rIns="91440" bIns="45720" rtlCol="0" anchor="b"/>
+          <a:lstStyle>
+            <a:lvl1pPr algn="l">
+              <a:defRPr sz="1200"/>
+            </a:lvl1pPr>
+          </a:lstStyle>
+          <a:p>
+            <a:endParaRPr lang="da-DK"/>
+          </a:p>
+        </p:txBody>
+      </p:sp>
+      <p:sp>
+        <p:nvSpPr>
+          <p:cNvPr id="7" name="Pladsholder til slidenummer 6"/>
+          <p:cNvSpPr>
+            <a:spLocks noGrp="1"/>
+          </p:cNvSpPr>
+          <p:nvPr>
+            <p:ph type="sldNum" sz="quarter" idx="5"/>
+          </p:nvPr>
+        </p:nvSpPr>
+        <p:spPr>
+          <a:xfrm>
+            <a:off x="3884613" y="8685213"/>
+            <a:ext cx="2971800" cy="458787"/>
+          </a:xfrm>
+          <a:prstGeom prst="rect">
+            <a:avLst/>
+          </a:prstGeom>
+        </p:spPr>
+        <p:txBody>
+          <a:bodyPr vert="horz" lIns="91440" tIns="45720" rIns="91440" bIns="45720" rtlCol="0" anchor="b"/>
+          <a:lstStyle>
+            <a:lvl1pPr algn="r">
+              <a:defRPr sz="1200"/>
+            </a:lvl1pPr>
+          </a:lstStyle>
+          <a:p>
+            <a:fld id="{0C476533-93FC-4D57-8A0F-AC113017DA2B}" type="slidenum">
+              <a:rPr lang="da-DK" smtClean="0"/>
+              <a:t>‹nr.›</a:t>
+            </a:fld>
+            <a:endParaRPr lang="da-DK"/>
+          </a:p>
+        </p:txBody>
+      </p:sp>
+    </p:spTree>
+    <p:extLst>
+      <p:ext uri="{BB962C8B-B14F-4D97-AF65-F5344CB8AC3E}">
+        <p14:creationId xmlns:p14="http://schemas.microsoft.com/office/powerpoint/2010/main" val="3804874233"/>
+      </p:ext>
+    </p:extLst>
+  </p:cSld>
+  <p:clrMap bg1="lt1" tx1="dk1" bg2="lt2" tx2="dk2" accent1="accent1" accent2="accent2" accent3="accent3" accent4="accent4" accent5="accent5" accent6="accent6" hlink="hlink" folHlink="folHlink"/>
+  <p:notesStyle>
+    <a:lvl1pPr marL="0" algn="l" defTabSz="914400" rtl="0" eaLnBrk="1" latinLnBrk="0" hangingPunct="1">
+      <a:defRPr sz="1200" kern="1200">
+        <a:solidFill>
+          <a:schemeClr val="tx1"/>
+        </a:solidFill>
+        <a:latin typeface="+mn-lt"/>
+        <a:ea typeface="+mn-ea"/>
+        <a:cs typeface="+mn-cs"/>
+      </a:defRPr>
+    </a:lvl1pPr>
+    <a:lvl2pPr marL="457200" algn="l" defTabSz="914400" rtl="0" eaLnBrk="1" latinLnBrk="0" hangingPunct="1">
+      <a:defRPr sz="1200" kern="1200">
+        <a:solidFill>
+          <a:schemeClr val="tx1"/>
+        </a:solidFill>
+        <a:latin typeface="+mn-lt"/>
+        <a:ea typeface="+mn-ea"/>
+        <a:cs typeface="+mn-cs"/>
+      </a:defRPr>
+    </a:lvl2pPr>
+    <a:lvl3pPr marL="914400" algn="l" defTabSz="914400" rtl="0" eaLnBrk="1" latinLnBrk="0" hangingPunct="1">
+      <a:defRPr sz="1200" kern="1200">
+        <a:solidFill>
+          <a:schemeClr val="tx1"/>
+        </a:solidFill>
+        <a:latin typeface="+mn-lt"/>
+        <a:ea typeface="+mn-ea"/>
+        <a:cs typeface="+mn-cs"/>
+      </a:defRPr>
+    </a:lvl3pPr>
+    <a:lvl4pPr marL="1371600" algn="l" defTabSz="914400" rtl="0" eaLnBrk="1" latinLnBrk="0" hangingPunct="1">
+      <a:defRPr sz="1200" kern="1200">
+        <a:solidFill>
+          <a:schemeClr val="tx1"/>
+        </a:solidFill>
+        <a:latin typeface="+mn-lt"/>
+        <a:ea typeface="+mn-ea"/>
+        <a:cs typeface="+mn-cs"/>
+      </a:defRPr>
+    </a:lvl4pPr>
+    <a:lvl5pPr marL="1828800" algn="l" defTabSz="914400" rtl="0" eaLnBrk="1" latinLnBrk="0" hangingPunct="1">
+      <a:defRPr sz="1200" kern="1200">
+        <a:solidFill>
+          <a:schemeClr val="tx1"/>
+        </a:solidFill>
+        <a:latin typeface="+mn-lt"/>
+        <a:ea typeface="+mn-ea"/>
+        <a:cs typeface="+mn-cs"/>
+      </a:defRPr>
+    </a:lvl5pPr>
+    <a:lvl6pPr marL="2286000" algn="l" defTabSz="914400" rtl="0" eaLnBrk="1" latinLnBrk="0" hangingPunct="1">
+      <a:defRPr sz="1200" kern="1200">
+        <a:solidFill>
+          <a:schemeClr val="tx1"/>
+        </a:solidFill>
+        <a:latin typeface="+mn-lt"/>
+        <a:ea typeface="+mn-ea"/>
+        <a:cs typeface="+mn-cs"/>
+      </a:defRPr>
+    </a:lvl6pPr>
+    <a:lvl7pPr marL="2743200" algn="l" defTabSz="914400" rtl="0" eaLnBrk="1" latinLnBrk="0" hangingPunct="1">
+      <a:defRPr sz="1200" kern="1200">
+        <a:solidFill>
+          <a:schemeClr val="tx1"/>
+        </a:solidFill>
+        <a:latin typeface="+mn-lt"/>
+        <a:ea typeface="+mn-ea"/>
+        <a:cs typeface="+mn-cs"/>
+      </a:defRPr>
+    </a:lvl7pPr>
+    <a:lvl8pPr marL="3200400" algn="l" defTabSz="914400" rtl="0" eaLnBrk="1" latinLnBrk="0" hangingPunct="1">
+      <a:defRPr sz="1200" kern="1200">
+        <a:solidFill>
+          <a:schemeClr val="tx1"/>
+        </a:solidFill>
+        <a:latin typeface="+mn-lt"/>
+        <a:ea typeface="+mn-ea"/>
+        <a:cs typeface="+mn-cs"/>
+      </a:defRPr>
+    </a:lvl8pPr>
+    <a:lvl9pPr marL="3657600" algn="l" defTabSz="914400" rtl="0" eaLnBrk="1" latinLnBrk="0" hangingPunct="1">
+      <a:defRPr sz="1200" kern="1200">
+        <a:solidFill>
+          <a:schemeClr val="tx1"/>
+        </a:solidFill>
+        <a:latin typeface="+mn-lt"/>
+        <a:ea typeface="+mn-ea"/>
+        <a:cs typeface="+mn-cs"/>
+      </a:defRPr>
+    </a:lvl9pPr>
+  </p:notesStyle>
+</p:notesMaster>
+</file>
+
+<file path=ppt/notesSlides/notesSlide1.xml><?xml version="1.0" encoding="utf-8"?>
+<p:notes xmlns:a="http://schemas.openxmlformats.org/drawingml/2006/main" xmlns:r="http://schemas.openxmlformats.org/officeDocument/2006/relationships" xmlns:p="http://schemas.openxmlformats.org/presentationml/2006/main">
+  <p:cSld>
+    <p:spTree>
+      <p:nvGrpSpPr>
+        <p:cNvPr id="1" name=""/>
+        <p:cNvGrpSpPr/>
+        <p:nvPr/>
+      </p:nvGrpSpPr>
+      <p:grpSpPr>
+        <a:xfrm>
+          <a:off x="0" y="0"/>
+          <a:ext cx="0" cy="0"/>
+          <a:chOff x="0" y="0"/>
+          <a:chExt cx="0" cy="0"/>
+        </a:xfrm>
+      </p:grpSpPr>
+      <p:sp>
+        <p:nvSpPr>
+          <p:cNvPr id="2" name="Pladsholder til slidebillede 1"/>
+          <p:cNvSpPr>
+            <a:spLocks noGrp="1" noRot="1" noChangeAspect="1"/>
+          </p:cNvSpPr>
+          <p:nvPr>
+            <p:ph type="sldImg"/>
+          </p:nvPr>
+        </p:nvSpPr>
+        <p:spPr/>
+      </p:sp>
+      <p:sp>
+        <p:nvSpPr>
+          <p:cNvPr id="3" name="Pladsholder til noter 2"/>
+          <p:cNvSpPr>
+            <a:spLocks noGrp="1"/>
+          </p:cNvSpPr>
+          <p:nvPr>
+            <p:ph type="body" idx="1"/>
+          </p:nvPr>
+        </p:nvSpPr>
+        <p:spPr/>
+        <p:txBody>
+          <a:bodyPr/>
+          <a:lstStyle/>
+          <a:p>
+            <a:r>
+              <a:rPr lang="da-DK" dirty="0"/>
+              <a:t>Kirstine</a:t>
+            </a:r>
+          </a:p>
+        </p:txBody>
+      </p:sp>
+      <p:sp>
+        <p:nvSpPr>
+          <p:cNvPr id="4" name="Pladsholder til slidenummer 3"/>
+          <p:cNvSpPr>
+            <a:spLocks noGrp="1"/>
+          </p:cNvSpPr>
+          <p:nvPr>
+            <p:ph type="sldNum" sz="quarter" idx="5"/>
+          </p:nvPr>
+        </p:nvSpPr>
+        <p:spPr/>
+        <p:txBody>
+          <a:bodyPr/>
+          <a:lstStyle/>
+          <a:p>
+            <a:fld id="{0C476533-93FC-4D57-8A0F-AC113017DA2B}" type="slidenum">
+              <a:rPr lang="da-DK" smtClean="0"/>
+              <a:t>2</a:t>
+            </a:fld>
+            <a:endParaRPr lang="da-DK"/>
+          </a:p>
+        </p:txBody>
+      </p:sp>
+    </p:spTree>
+    <p:extLst>
+      <p:ext uri="{BB962C8B-B14F-4D97-AF65-F5344CB8AC3E}">
+        <p14:creationId xmlns:p14="http://schemas.microsoft.com/office/powerpoint/2010/main" val="3875883362"/>
+      </p:ext>
+    </p:extLst>
+  </p:cSld>
+  <p:clrMapOvr>
+    <a:masterClrMapping/>
+  </p:clrMapOvr>
+</p:notes>
+</file>
+
+<file path=ppt/notesSlides/notesSlide2.xml><?xml version="1.0" encoding="utf-8"?>
+<p:notes xmlns:a="http://schemas.openxmlformats.org/drawingml/2006/main" xmlns:r="http://schemas.openxmlformats.org/officeDocument/2006/relationships" xmlns:p="http://schemas.openxmlformats.org/presentationml/2006/main">
+  <p:cSld>
+    <p:spTree>
+      <p:nvGrpSpPr>
+        <p:cNvPr id="1" name=""/>
+        <p:cNvGrpSpPr/>
+        <p:nvPr/>
+      </p:nvGrpSpPr>
+      <p:grpSpPr>
+        <a:xfrm>
+          <a:off x="0" y="0"/>
+          <a:ext cx="0" cy="0"/>
+          <a:chOff x="0" y="0"/>
+          <a:chExt cx="0" cy="0"/>
+        </a:xfrm>
+      </p:grpSpPr>
+      <p:sp>
+        <p:nvSpPr>
+          <p:cNvPr id="2" name="Pladsholder til slidebillede 1"/>
+          <p:cNvSpPr>
+            <a:spLocks noGrp="1" noRot="1" noChangeAspect="1"/>
+          </p:cNvSpPr>
+          <p:nvPr>
+            <p:ph type="sldImg"/>
+          </p:nvPr>
+        </p:nvSpPr>
+        <p:spPr/>
+      </p:sp>
+      <p:sp>
+        <p:nvSpPr>
+          <p:cNvPr id="3" name="Pladsholder til noter 2"/>
+          <p:cNvSpPr>
+            <a:spLocks noGrp="1"/>
+          </p:cNvSpPr>
+          <p:nvPr>
+            <p:ph type="body" idx="1"/>
+          </p:nvPr>
+        </p:nvSpPr>
+        <p:spPr/>
+        <p:txBody>
+          <a:bodyPr/>
+          <a:lstStyle/>
+          <a:p>
+            <a:r>
+              <a:rPr lang="da-DK" dirty="0"/>
+              <a:t>Christian</a:t>
+            </a:r>
+          </a:p>
+        </p:txBody>
+      </p:sp>
+      <p:sp>
+        <p:nvSpPr>
+          <p:cNvPr id="4" name="Pladsholder til slidenummer 3"/>
+          <p:cNvSpPr>
+            <a:spLocks noGrp="1"/>
+          </p:cNvSpPr>
+          <p:nvPr>
+            <p:ph type="sldNum" sz="quarter" idx="5"/>
+          </p:nvPr>
+        </p:nvSpPr>
+        <p:spPr/>
+        <p:txBody>
+          <a:bodyPr/>
+          <a:lstStyle/>
+          <a:p>
+            <a:fld id="{0C476533-93FC-4D57-8A0F-AC113017DA2B}" type="slidenum">
+              <a:rPr lang="da-DK" smtClean="0"/>
+              <a:t>3</a:t>
+            </a:fld>
+            <a:endParaRPr lang="da-DK"/>
+          </a:p>
+        </p:txBody>
+      </p:sp>
+    </p:spTree>
+    <p:extLst>
+      <p:ext uri="{BB962C8B-B14F-4D97-AF65-F5344CB8AC3E}">
+        <p14:creationId xmlns:p14="http://schemas.microsoft.com/office/powerpoint/2010/main" val="86121351"/>
+      </p:ext>
+    </p:extLst>
+  </p:cSld>
+  <p:clrMapOvr>
+    <a:masterClrMapping/>
+  </p:clrMapOvr>
+</p:notes>
+</file>
+
+<file path=ppt/notesSlides/notesSlide3.xml><?xml version="1.0" encoding="utf-8"?>
+<p:notes xmlns:a="http://schemas.openxmlformats.org/drawingml/2006/main" xmlns:r="http://schemas.openxmlformats.org/officeDocument/2006/relationships" xmlns:p="http://schemas.openxmlformats.org/presentationml/2006/main">
+  <p:cSld>
+    <p:spTree>
+      <p:nvGrpSpPr>
+        <p:cNvPr id="1" name=""/>
+        <p:cNvGrpSpPr/>
+        <p:nvPr/>
+      </p:nvGrpSpPr>
+      <p:grpSpPr>
+        <a:xfrm>
+          <a:off x="0" y="0"/>
+          <a:ext cx="0" cy="0"/>
+          <a:chOff x="0" y="0"/>
+          <a:chExt cx="0" cy="0"/>
+        </a:xfrm>
+      </p:grpSpPr>
+      <p:sp>
+        <p:nvSpPr>
+          <p:cNvPr id="2" name="Pladsholder til slidebillede 1"/>
+          <p:cNvSpPr>
+            <a:spLocks noGrp="1" noRot="1" noChangeAspect="1"/>
+          </p:cNvSpPr>
+          <p:nvPr>
+            <p:ph type="sldImg"/>
+          </p:nvPr>
+        </p:nvSpPr>
+        <p:spPr/>
+      </p:sp>
+      <p:sp>
+        <p:nvSpPr>
+          <p:cNvPr id="3" name="Pladsholder til noter 2"/>
+          <p:cNvSpPr>
+            <a:spLocks noGrp="1"/>
+          </p:cNvSpPr>
+          <p:nvPr>
+            <p:ph type="body" idx="1"/>
+          </p:nvPr>
+        </p:nvSpPr>
+        <p:spPr/>
+        <p:txBody>
+          <a:bodyPr/>
+          <a:lstStyle/>
+          <a:p>
+            <a:r>
+              <a:rPr lang="da-DK" dirty="0"/>
+              <a:t>Nicolai</a:t>
+            </a:r>
+          </a:p>
+        </p:txBody>
+      </p:sp>
+      <p:sp>
+        <p:nvSpPr>
+          <p:cNvPr id="4" name="Pladsholder til slidenummer 3"/>
+          <p:cNvSpPr>
+            <a:spLocks noGrp="1"/>
+          </p:cNvSpPr>
+          <p:nvPr>
+            <p:ph type="sldNum" sz="quarter" idx="5"/>
+          </p:nvPr>
+        </p:nvSpPr>
+        <p:spPr/>
+        <p:txBody>
+          <a:bodyPr/>
+          <a:lstStyle/>
+          <a:p>
+            <a:fld id="{0C476533-93FC-4D57-8A0F-AC113017DA2B}" type="slidenum">
+              <a:rPr lang="da-DK" smtClean="0"/>
+              <a:t>4</a:t>
+            </a:fld>
+            <a:endParaRPr lang="da-DK"/>
+          </a:p>
+        </p:txBody>
+      </p:sp>
+    </p:spTree>
+    <p:extLst>
+      <p:ext uri="{BB962C8B-B14F-4D97-AF65-F5344CB8AC3E}">
+        <p14:creationId xmlns:p14="http://schemas.microsoft.com/office/powerpoint/2010/main" val="2822823004"/>
+      </p:ext>
+    </p:extLst>
+  </p:cSld>
+  <p:clrMapOvr>
+    <a:masterClrMapping/>
+  </p:clrMapOvr>
+</p:notes>
+</file>
+
+<file path=ppt/notesSlides/notesSlide4.xml><?xml version="1.0" encoding="utf-8"?>
+<p:notes xmlns:a="http://schemas.openxmlformats.org/drawingml/2006/main" xmlns:r="http://schemas.openxmlformats.org/officeDocument/2006/relationships" xmlns:p="http://schemas.openxmlformats.org/presentationml/2006/main">
+  <p:cSld>
+    <p:spTree>
+      <p:nvGrpSpPr>
+        <p:cNvPr id="1" name=""/>
+        <p:cNvGrpSpPr/>
+        <p:nvPr/>
+      </p:nvGrpSpPr>
+      <p:grpSpPr>
+        <a:xfrm>
+          <a:off x="0" y="0"/>
+          <a:ext cx="0" cy="0"/>
+          <a:chOff x="0" y="0"/>
+          <a:chExt cx="0" cy="0"/>
+        </a:xfrm>
+      </p:grpSpPr>
+      <p:sp>
+        <p:nvSpPr>
+          <p:cNvPr id="2" name="Pladsholder til slidebillede 1"/>
+          <p:cNvSpPr>
+            <a:spLocks noGrp="1" noRot="1" noChangeAspect="1"/>
+          </p:cNvSpPr>
+          <p:nvPr>
+            <p:ph type="sldImg"/>
+          </p:nvPr>
+        </p:nvSpPr>
+        <p:spPr/>
+      </p:sp>
+      <p:sp>
+        <p:nvSpPr>
+          <p:cNvPr id="3" name="Pladsholder til noter 2"/>
+          <p:cNvSpPr>
+            <a:spLocks noGrp="1"/>
+          </p:cNvSpPr>
+          <p:nvPr>
+            <p:ph type="body" idx="1"/>
+          </p:nvPr>
+        </p:nvSpPr>
+        <p:spPr/>
+        <p:txBody>
+          <a:bodyPr/>
+          <a:lstStyle/>
+          <a:p>
+            <a:r>
+              <a:rPr lang="da-DK" dirty="0"/>
+              <a:t>Henrik</a:t>
+            </a:r>
+          </a:p>
+        </p:txBody>
+      </p:sp>
+      <p:sp>
+        <p:nvSpPr>
+          <p:cNvPr id="4" name="Pladsholder til slidenummer 3"/>
+          <p:cNvSpPr>
+            <a:spLocks noGrp="1"/>
+          </p:cNvSpPr>
+          <p:nvPr>
+            <p:ph type="sldNum" sz="quarter" idx="5"/>
+          </p:nvPr>
+        </p:nvSpPr>
+        <p:spPr/>
+        <p:txBody>
+          <a:bodyPr/>
+          <a:lstStyle/>
+          <a:p>
+            <a:fld id="{0C476533-93FC-4D57-8A0F-AC113017DA2B}" type="slidenum">
+              <a:rPr lang="da-DK" smtClean="0"/>
+              <a:t>5</a:t>
+            </a:fld>
+            <a:endParaRPr lang="da-DK"/>
+          </a:p>
+        </p:txBody>
+      </p:sp>
+    </p:spTree>
+    <p:extLst>
+      <p:ext uri="{BB962C8B-B14F-4D97-AF65-F5344CB8AC3E}">
+        <p14:creationId xmlns:p14="http://schemas.microsoft.com/office/powerpoint/2010/main" val="3670694784"/>
+      </p:ext>
+    </p:extLst>
+  </p:cSld>
+  <p:clrMapOvr>
+    <a:masterClrMapping/>
+  </p:clrMapOvr>
+</p:notes>
+</file>
+
+<file path=ppt/notesSlides/notesSlide5.xml><?xml version="1.0" encoding="utf-8"?>
+<p:notes xmlns:a="http://schemas.openxmlformats.org/drawingml/2006/main" xmlns:r="http://schemas.openxmlformats.org/officeDocument/2006/relationships" xmlns:p="http://schemas.openxmlformats.org/presentationml/2006/main">
+  <p:cSld>
+    <p:spTree>
+      <p:nvGrpSpPr>
+        <p:cNvPr id="1" name=""/>
+        <p:cNvGrpSpPr/>
+        <p:nvPr/>
+      </p:nvGrpSpPr>
+      <p:grpSpPr>
+        <a:xfrm>
+          <a:off x="0" y="0"/>
+          <a:ext cx="0" cy="0"/>
+          <a:chOff x="0" y="0"/>
+          <a:chExt cx="0" cy="0"/>
+        </a:xfrm>
+      </p:grpSpPr>
+      <p:sp>
+        <p:nvSpPr>
+          <p:cNvPr id="2" name="Pladsholder til slidebillede 1"/>
+          <p:cNvSpPr>
+            <a:spLocks noGrp="1" noRot="1" noChangeAspect="1"/>
+          </p:cNvSpPr>
+          <p:nvPr>
+            <p:ph type="sldImg"/>
+          </p:nvPr>
+        </p:nvSpPr>
+        <p:spPr/>
+      </p:sp>
+      <p:sp>
+        <p:nvSpPr>
+          <p:cNvPr id="3" name="Pladsholder til noter 2"/>
+          <p:cNvSpPr>
+            <a:spLocks noGrp="1"/>
+          </p:cNvSpPr>
+          <p:nvPr>
+            <p:ph type="body" idx="1"/>
+          </p:nvPr>
+        </p:nvSpPr>
+        <p:spPr/>
+        <p:txBody>
+          <a:bodyPr/>
+          <a:lstStyle/>
+          <a:p>
+            <a:r>
+              <a:rPr lang="da-DK" dirty="0"/>
+              <a:t>Henrik</a:t>
+            </a:r>
+          </a:p>
+        </p:txBody>
+      </p:sp>
+      <p:sp>
+        <p:nvSpPr>
+          <p:cNvPr id="4" name="Pladsholder til slidenummer 3"/>
+          <p:cNvSpPr>
+            <a:spLocks noGrp="1"/>
+          </p:cNvSpPr>
+          <p:nvPr>
+            <p:ph type="sldNum" sz="quarter" idx="5"/>
+          </p:nvPr>
+        </p:nvSpPr>
+        <p:spPr/>
+        <p:txBody>
+          <a:bodyPr/>
+          <a:lstStyle/>
+          <a:p>
+            <a:fld id="{0C476533-93FC-4D57-8A0F-AC113017DA2B}" type="slidenum">
+              <a:rPr lang="da-DK" smtClean="0"/>
+              <a:t>6</a:t>
+            </a:fld>
+            <a:endParaRPr lang="da-DK"/>
+          </a:p>
+        </p:txBody>
+      </p:sp>
+    </p:spTree>
+    <p:extLst>
+      <p:ext uri="{BB962C8B-B14F-4D97-AF65-F5344CB8AC3E}">
+        <p14:creationId xmlns:p14="http://schemas.microsoft.com/office/powerpoint/2010/main" val="3882808547"/>
+      </p:ext>
+    </p:extLst>
+  </p:cSld>
+  <p:clrMapOvr>
+    <a:masterClrMapping/>
+  </p:clrMapOvr>
+</p:notes>
+</file>
+
+<file path=ppt/notesSlides/notesSlide6.xml><?xml version="1.0" encoding="utf-8"?>
+<p:notes xmlns:a="http://schemas.openxmlformats.org/drawingml/2006/main" xmlns:r="http://schemas.openxmlformats.org/officeDocument/2006/relationships" xmlns:p="http://schemas.openxmlformats.org/presentationml/2006/main">
+  <p:cSld>
+    <p:spTree>
+      <p:nvGrpSpPr>
+        <p:cNvPr id="1" name=""/>
+        <p:cNvGrpSpPr/>
+        <p:nvPr/>
+      </p:nvGrpSpPr>
+      <p:grpSpPr>
+        <a:xfrm>
+          <a:off x="0" y="0"/>
+          <a:ext cx="0" cy="0"/>
+          <a:chOff x="0" y="0"/>
+          <a:chExt cx="0" cy="0"/>
+        </a:xfrm>
+      </p:grpSpPr>
+      <p:sp>
+        <p:nvSpPr>
+          <p:cNvPr id="2" name="Pladsholder til slidebillede 1"/>
+          <p:cNvSpPr>
+            <a:spLocks noGrp="1" noRot="1" noChangeAspect="1"/>
+          </p:cNvSpPr>
+          <p:nvPr>
+            <p:ph type="sldImg"/>
+          </p:nvPr>
+        </p:nvSpPr>
+        <p:spPr/>
+      </p:sp>
+      <p:sp>
+        <p:nvSpPr>
+          <p:cNvPr id="3" name="Pladsholder til noter 2"/>
+          <p:cNvSpPr>
+            <a:spLocks noGrp="1"/>
+          </p:cNvSpPr>
+          <p:nvPr>
+            <p:ph type="body" idx="1"/>
+          </p:nvPr>
+        </p:nvSpPr>
+        <p:spPr/>
+        <p:txBody>
+          <a:bodyPr/>
+          <a:lstStyle/>
+          <a:p>
+            <a:r>
+              <a:rPr lang="da-DK" dirty="0"/>
+              <a:t>Christian</a:t>
+            </a:r>
+          </a:p>
+        </p:txBody>
+      </p:sp>
+      <p:sp>
+        <p:nvSpPr>
+          <p:cNvPr id="4" name="Pladsholder til slidenummer 3"/>
+          <p:cNvSpPr>
+            <a:spLocks noGrp="1"/>
+          </p:cNvSpPr>
+          <p:nvPr>
+            <p:ph type="sldNum" sz="quarter" idx="5"/>
+          </p:nvPr>
+        </p:nvSpPr>
+        <p:spPr/>
+        <p:txBody>
+          <a:bodyPr/>
+          <a:lstStyle/>
+          <a:p>
+            <a:fld id="{0C476533-93FC-4D57-8A0F-AC113017DA2B}" type="slidenum">
+              <a:rPr lang="da-DK" smtClean="0"/>
+              <a:t>7</a:t>
+            </a:fld>
+            <a:endParaRPr lang="da-DK"/>
+          </a:p>
+        </p:txBody>
+      </p:sp>
+    </p:spTree>
+    <p:extLst>
+      <p:ext uri="{BB962C8B-B14F-4D97-AF65-F5344CB8AC3E}">
+        <p14:creationId xmlns:p14="http://schemas.microsoft.com/office/powerpoint/2010/main" val="2590413493"/>
+      </p:ext>
+    </p:extLst>
+  </p:cSld>
+  <p:clrMapOvr>
+    <a:masterClrMapping/>
+  </p:clrMapOvr>
+</p:notes>
+</file>
+
+<file path=ppt/notesSlides/notesSlide7.xml><?xml version="1.0" encoding="utf-8"?>
+<p:notes xmlns:a="http://schemas.openxmlformats.org/drawingml/2006/main" xmlns:r="http://schemas.openxmlformats.org/officeDocument/2006/relationships" xmlns:p="http://schemas.openxmlformats.org/presentationml/2006/main">
+  <p:cSld>
+    <p:spTree>
+      <p:nvGrpSpPr>
+        <p:cNvPr id="1" name=""/>
+        <p:cNvGrpSpPr/>
+        <p:nvPr/>
+      </p:nvGrpSpPr>
+      <p:grpSpPr>
+        <a:xfrm>
+          <a:off x="0" y="0"/>
+          <a:ext cx="0" cy="0"/>
+          <a:chOff x="0" y="0"/>
+          <a:chExt cx="0" cy="0"/>
+        </a:xfrm>
+      </p:grpSpPr>
+      <p:sp>
+        <p:nvSpPr>
+          <p:cNvPr id="2" name="Pladsholder til slidebillede 1"/>
+          <p:cNvSpPr>
+            <a:spLocks noGrp="1" noRot="1" noChangeAspect="1"/>
+          </p:cNvSpPr>
+          <p:nvPr>
+            <p:ph type="sldImg"/>
+          </p:nvPr>
+        </p:nvSpPr>
+        <p:spPr/>
+      </p:sp>
+      <p:sp>
+        <p:nvSpPr>
+          <p:cNvPr id="3" name="Pladsholder til noter 2"/>
+          <p:cNvSpPr>
+            <a:spLocks noGrp="1"/>
+          </p:cNvSpPr>
+          <p:nvPr>
+            <p:ph type="body" idx="1"/>
+          </p:nvPr>
+        </p:nvSpPr>
+        <p:spPr/>
+        <p:txBody>
+          <a:bodyPr/>
+          <a:lstStyle/>
+          <a:p>
+            <a:r>
+              <a:rPr lang="da-DK" dirty="0"/>
+              <a:t>Nicolai</a:t>
+            </a:r>
+          </a:p>
+        </p:txBody>
+      </p:sp>
+      <p:sp>
+        <p:nvSpPr>
+          <p:cNvPr id="4" name="Pladsholder til slidenummer 3"/>
+          <p:cNvSpPr>
+            <a:spLocks noGrp="1"/>
+          </p:cNvSpPr>
+          <p:nvPr>
+            <p:ph type="sldNum" sz="quarter" idx="5"/>
+          </p:nvPr>
+        </p:nvSpPr>
+        <p:spPr/>
+        <p:txBody>
+          <a:bodyPr/>
+          <a:lstStyle/>
+          <a:p>
+            <a:fld id="{0C476533-93FC-4D57-8A0F-AC113017DA2B}" type="slidenum">
+              <a:rPr lang="da-DK" smtClean="0"/>
+              <a:t>8</a:t>
+            </a:fld>
+            <a:endParaRPr lang="da-DK"/>
+          </a:p>
+        </p:txBody>
+      </p:sp>
+    </p:spTree>
+    <p:extLst>
+      <p:ext uri="{BB962C8B-B14F-4D97-AF65-F5344CB8AC3E}">
+        <p14:creationId xmlns:p14="http://schemas.microsoft.com/office/powerpoint/2010/main" val="2010393921"/>
+      </p:ext>
+    </p:extLst>
+  </p:cSld>
+  <p:clrMapOvr>
+    <a:masterClrMapping/>
+  </p:clrMapOvr>
+</p:notes>
+</file>
+
+<file path=ppt/notesSlides/notesSlide8.xml><?xml version="1.0" encoding="utf-8"?>
+<p:notes xmlns:a="http://schemas.openxmlformats.org/drawingml/2006/main" xmlns:r="http://schemas.openxmlformats.org/officeDocument/2006/relationships" xmlns:p="http://schemas.openxmlformats.org/presentationml/2006/main">
+  <p:cSld>
+    <p:spTree>
+      <p:nvGrpSpPr>
+        <p:cNvPr id="1" name=""/>
+        <p:cNvGrpSpPr/>
+        <p:nvPr/>
+      </p:nvGrpSpPr>
+      <p:grpSpPr>
+        <a:xfrm>
+          <a:off x="0" y="0"/>
+          <a:ext cx="0" cy="0"/>
+          <a:chOff x="0" y="0"/>
+          <a:chExt cx="0" cy="0"/>
+        </a:xfrm>
+      </p:grpSpPr>
+      <p:sp>
+        <p:nvSpPr>
+          <p:cNvPr id="2" name="Pladsholder til slidebillede 1"/>
+          <p:cNvSpPr>
+            <a:spLocks noGrp="1" noRot="1" noChangeAspect="1"/>
+          </p:cNvSpPr>
+          <p:nvPr>
+            <p:ph type="sldImg"/>
+          </p:nvPr>
+        </p:nvSpPr>
+        <p:spPr/>
+      </p:sp>
+      <p:sp>
+        <p:nvSpPr>
+          <p:cNvPr id="3" name="Pladsholder til noter 2"/>
+          <p:cNvSpPr>
+            <a:spLocks noGrp="1"/>
+          </p:cNvSpPr>
+          <p:nvPr>
+            <p:ph type="body" idx="1"/>
+          </p:nvPr>
+        </p:nvSpPr>
+        <p:spPr/>
+        <p:txBody>
+          <a:bodyPr/>
+          <a:lstStyle/>
+          <a:p>
+            <a:r>
+              <a:rPr lang="da-DK" dirty="0"/>
+              <a:t>Kirstine </a:t>
+            </a:r>
+            <a:r>
+              <a:rPr lang="da-DK" dirty="0" err="1"/>
+              <a:t>use</a:t>
+            </a:r>
+            <a:r>
+              <a:rPr lang="da-DK" dirty="0"/>
+              <a:t> case diagram, </a:t>
+            </a:r>
+            <a:r>
+              <a:rPr lang="da-DK"/>
+              <a:t>Henrik klasse diagram</a:t>
+            </a:r>
+            <a:endParaRPr lang="da-DK" dirty="0"/>
+          </a:p>
+        </p:txBody>
+      </p:sp>
+      <p:sp>
+        <p:nvSpPr>
+          <p:cNvPr id="4" name="Pladsholder til slidenummer 3"/>
+          <p:cNvSpPr>
+            <a:spLocks noGrp="1"/>
+          </p:cNvSpPr>
+          <p:nvPr>
+            <p:ph type="sldNum" sz="quarter" idx="5"/>
+          </p:nvPr>
+        </p:nvSpPr>
+        <p:spPr/>
+        <p:txBody>
+          <a:bodyPr/>
+          <a:lstStyle/>
+          <a:p>
+            <a:fld id="{0C476533-93FC-4D57-8A0F-AC113017DA2B}" type="slidenum">
+              <a:rPr lang="da-DK" smtClean="0"/>
+              <a:t>9</a:t>
+            </a:fld>
+            <a:endParaRPr lang="da-DK"/>
+          </a:p>
+        </p:txBody>
+      </p:sp>
+    </p:spTree>
+    <p:extLst>
+      <p:ext uri="{BB962C8B-B14F-4D97-AF65-F5344CB8AC3E}">
+        <p14:creationId xmlns:p14="http://schemas.microsoft.com/office/powerpoint/2010/main" val="2589400256"/>
+      </p:ext>
+    </p:extLst>
+  </p:cSld>
+  <p:clrMapOvr>
+    <a:masterClrMapping/>
+  </p:clrMapOvr>
+</p:notes>
+</file>
+
+<file path=ppt/notesSlides/notesSlide9.xml><?xml version="1.0" encoding="utf-8"?>
+<p:notes xmlns:a="http://schemas.openxmlformats.org/drawingml/2006/main" xmlns:r="http://schemas.openxmlformats.org/officeDocument/2006/relationships" xmlns:p="http://schemas.openxmlformats.org/presentationml/2006/main">
+  <p:cSld>
+    <p:spTree>
+      <p:nvGrpSpPr>
+        <p:cNvPr id="1" name=""/>
+        <p:cNvGrpSpPr/>
+        <p:nvPr/>
+      </p:nvGrpSpPr>
+      <p:grpSpPr>
+        <a:xfrm>
+          <a:off x="0" y="0"/>
+          <a:ext cx="0" cy="0"/>
+          <a:chOff x="0" y="0"/>
+          <a:chExt cx="0" cy="0"/>
+        </a:xfrm>
+      </p:grpSpPr>
+      <p:sp>
+        <p:nvSpPr>
+          <p:cNvPr id="2" name="Pladsholder til slidebillede 1"/>
+          <p:cNvSpPr>
+            <a:spLocks noGrp="1" noRot="1" noChangeAspect="1"/>
+          </p:cNvSpPr>
+          <p:nvPr>
+            <p:ph type="sldImg"/>
+          </p:nvPr>
+        </p:nvSpPr>
+        <p:spPr/>
+      </p:sp>
+      <p:sp>
+        <p:nvSpPr>
+          <p:cNvPr id="3" name="Pladsholder til noter 2"/>
+          <p:cNvSpPr>
+            <a:spLocks noGrp="1"/>
+          </p:cNvSpPr>
+          <p:nvPr>
+            <p:ph type="body" idx="1"/>
+          </p:nvPr>
+        </p:nvSpPr>
+        <p:spPr/>
+        <p:txBody>
+          <a:bodyPr/>
+          <a:lstStyle/>
+          <a:p>
+            <a:r>
+              <a:rPr lang="da-DK" dirty="0"/>
+              <a:t>Nicolai tager de første 3, Christian tager de næste 3, Henrik tager de sidste 3 og Kirstine tager Gruppe samarbejdet</a:t>
+            </a:r>
+          </a:p>
+        </p:txBody>
+      </p:sp>
+      <p:sp>
+        <p:nvSpPr>
+          <p:cNvPr id="4" name="Pladsholder til slidenummer 3"/>
+          <p:cNvSpPr>
+            <a:spLocks noGrp="1"/>
+          </p:cNvSpPr>
+          <p:nvPr>
+            <p:ph type="sldNum" sz="quarter" idx="5"/>
+          </p:nvPr>
+        </p:nvSpPr>
+        <p:spPr/>
+        <p:txBody>
+          <a:bodyPr/>
+          <a:lstStyle/>
+          <a:p>
+            <a:fld id="{0C476533-93FC-4D57-8A0F-AC113017DA2B}" type="slidenum">
+              <a:rPr lang="da-DK" smtClean="0"/>
+              <a:t>10</a:t>
+            </a:fld>
+            <a:endParaRPr lang="da-DK"/>
+          </a:p>
+        </p:txBody>
+      </p:sp>
+    </p:spTree>
+    <p:extLst>
+      <p:ext uri="{BB962C8B-B14F-4D97-AF65-F5344CB8AC3E}">
+        <p14:creationId xmlns:p14="http://schemas.microsoft.com/office/powerpoint/2010/main" val="3914887710"/>
+      </p:ext>
+    </p:extLst>
+  </p:cSld>
+  <p:clrMapOvr>
+    <a:masterClrMapping/>
+  </p:clrMapOvr>
+</p:notes>
 </file>
 
 <file path=ppt/slideLayouts/slideLayout1.xml><?xml version="1.0" encoding="utf-8"?>
@@ -280,6 +1437,13 @@
               <a:schemeClr val="lt1"/>
             </a:fontRef>
           </p:style>
+          <p:txBody>
+            <a:bodyPr/>
+            <a:lstStyle/>
+            <a:p>
+              <a:endParaRPr lang="da-DK"/>
+            </a:p>
+          </p:txBody>
         </p:sp>
         <p:sp>
           <p:nvSpPr>
@@ -343,6 +1507,13 @@
               <a:schemeClr val="lt1"/>
             </a:fontRef>
           </p:style>
+          <p:txBody>
+            <a:bodyPr/>
+            <a:lstStyle/>
+            <a:p>
+              <a:endParaRPr lang="da-DK"/>
+            </a:p>
+          </p:txBody>
         </p:sp>
         <p:sp>
           <p:nvSpPr>
@@ -384,6 +1555,13 @@
               <a:schemeClr val="lt1"/>
             </a:fontRef>
           </p:style>
+          <p:txBody>
+            <a:bodyPr/>
+            <a:lstStyle/>
+            <a:p>
+              <a:endParaRPr lang="da-DK"/>
+            </a:p>
+          </p:txBody>
         </p:sp>
         <p:sp>
           <p:nvSpPr>
@@ -448,6 +1626,13 @@
               <a:schemeClr val="lt1"/>
             </a:fontRef>
           </p:style>
+          <p:txBody>
+            <a:bodyPr/>
+            <a:lstStyle/>
+            <a:p>
+              <a:endParaRPr lang="da-DK"/>
+            </a:p>
+          </p:txBody>
         </p:sp>
         <p:sp>
           <p:nvSpPr>
@@ -513,6 +1698,13 @@
               <a:schemeClr val="lt1"/>
             </a:fontRef>
           </p:style>
+          <p:txBody>
+            <a:bodyPr/>
+            <a:lstStyle/>
+            <a:p>
+              <a:endParaRPr lang="da-DK"/>
+            </a:p>
+          </p:txBody>
         </p:sp>
         <p:sp>
           <p:nvSpPr>
@@ -576,6 +1768,13 @@
               <a:schemeClr val="lt1"/>
             </a:fontRef>
           </p:style>
+          <p:txBody>
+            <a:bodyPr/>
+            <a:lstStyle/>
+            <a:p>
+              <a:endParaRPr lang="da-DK"/>
+            </a:p>
+          </p:txBody>
         </p:sp>
         <p:sp>
           <p:nvSpPr>
@@ -617,6 +1816,13 @@
               <a:schemeClr val="lt1"/>
             </a:fontRef>
           </p:style>
+          <p:txBody>
+            <a:bodyPr/>
+            <a:lstStyle/>
+            <a:p>
+              <a:endParaRPr lang="da-DK"/>
+            </a:p>
+          </p:txBody>
         </p:sp>
         <p:sp>
           <p:nvSpPr>
@@ -658,6 +1864,13 @@
               <a:schemeClr val="lt1"/>
             </a:fontRef>
           </p:style>
+          <p:txBody>
+            <a:bodyPr/>
+            <a:lstStyle/>
+            <a:p>
+              <a:endParaRPr lang="da-DK"/>
+            </a:p>
+          </p:txBody>
         </p:sp>
       </p:grpSp>
       <p:sp>
@@ -835,7 +2048,7 @@
           <a:p>
             <a:fld id="{FE231444-B6D6-4C94-B78B-EDF9BDA6F4B0}" type="datetimeFigureOut">
               <a:rPr lang="da-DK" smtClean="0"/>
-              <a:t>12-06-2026</a:t>
+              <a:t>15-06-2026</a:t>
             </a:fld>
             <a:endParaRPr lang="da-DK"/>
           </a:p>
@@ -1086,7 +2299,7 @@
           <a:p>
             <a:fld id="{FE231444-B6D6-4C94-B78B-EDF9BDA6F4B0}" type="datetimeFigureOut">
               <a:rPr lang="da-DK" smtClean="0"/>
-              <a:t>12-06-2026</a:t>
+              <a:t>15-06-2026</a:t>
             </a:fld>
             <a:endParaRPr lang="da-DK"/>
           </a:p>
@@ -1400,7 +2613,7 @@
           <a:p>
             <a:fld id="{FE231444-B6D6-4C94-B78B-EDF9BDA6F4B0}" type="datetimeFigureOut">
               <a:rPr lang="da-DK" smtClean="0"/>
-              <a:t>12-06-2026</a:t>
+              <a:t>15-06-2026</a:t>
             </a:fld>
             <a:endParaRPr lang="da-DK"/>
           </a:p>
@@ -1741,7 +2954,7 @@
           <a:p>
             <a:fld id="{FE231444-B6D6-4C94-B78B-EDF9BDA6F4B0}" type="datetimeFigureOut">
               <a:rPr lang="da-DK" smtClean="0"/>
-              <a:t>12-06-2026</a:t>
+              <a:t>15-06-2026</a:t>
             </a:fld>
             <a:endParaRPr lang="da-DK"/>
           </a:p>
@@ -2055,7 +3268,7 @@
           <a:p>
             <a:fld id="{FE231444-B6D6-4C94-B78B-EDF9BDA6F4B0}" type="datetimeFigureOut">
               <a:rPr lang="da-DK" smtClean="0"/>
-              <a:t>12-06-2026</a:t>
+              <a:t>15-06-2026</a:t>
             </a:fld>
             <a:endParaRPr lang="da-DK"/>
           </a:p>
@@ -2448,7 +3661,7 @@
           <a:p>
             <a:fld id="{FE231444-B6D6-4C94-B78B-EDF9BDA6F4B0}" type="datetimeFigureOut">
               <a:rPr lang="da-DK" smtClean="0"/>
-              <a:t>12-06-2026</a:t>
+              <a:t>15-06-2026</a:t>
             </a:fld>
             <a:endParaRPr lang="da-DK"/>
           </a:p>
@@ -2618,7 +3831,7 @@
           <a:p>
             <a:fld id="{FE231444-B6D6-4C94-B78B-EDF9BDA6F4B0}" type="datetimeFigureOut">
               <a:rPr lang="da-DK" smtClean="0"/>
-              <a:t>12-06-2026</a:t>
+              <a:t>15-06-2026</a:t>
             </a:fld>
             <a:endParaRPr lang="da-DK"/>
           </a:p>
@@ -2798,7 +4011,7 @@
           <a:p>
             <a:fld id="{FE231444-B6D6-4C94-B78B-EDF9BDA6F4B0}" type="datetimeFigureOut">
               <a:rPr lang="da-DK" smtClean="0"/>
-              <a:t>12-06-2026</a:t>
+              <a:t>15-06-2026</a:t>
             </a:fld>
             <a:endParaRPr lang="da-DK"/>
           </a:p>
@@ -2974,7 +4187,7 @@
           <a:p>
             <a:fld id="{FE231444-B6D6-4C94-B78B-EDF9BDA6F4B0}" type="datetimeFigureOut">
               <a:rPr lang="da-DK" smtClean="0"/>
-              <a:t>12-06-2026</a:t>
+              <a:t>15-06-2026</a:t>
             </a:fld>
             <a:endParaRPr lang="da-DK"/>
           </a:p>
@@ -3221,7 +4434,7 @@
           <a:p>
             <a:fld id="{FE231444-B6D6-4C94-B78B-EDF9BDA6F4B0}" type="datetimeFigureOut">
               <a:rPr lang="da-DK" smtClean="0"/>
-              <a:t>12-06-2026</a:t>
+              <a:t>15-06-2026</a:t>
             </a:fld>
             <a:endParaRPr lang="da-DK"/>
           </a:p>
@@ -3453,7 +4666,7 @@
           <a:p>
             <a:fld id="{FE231444-B6D6-4C94-B78B-EDF9BDA6F4B0}" type="datetimeFigureOut">
               <a:rPr lang="da-DK" smtClean="0"/>
-              <a:t>12-06-2026</a:t>
+              <a:t>15-06-2026</a:t>
             </a:fld>
             <a:endParaRPr lang="da-DK"/>
           </a:p>
@@ -3827,7 +5040,7 @@
           <a:p>
             <a:fld id="{FE231444-B6D6-4C94-B78B-EDF9BDA6F4B0}" type="datetimeFigureOut">
               <a:rPr lang="da-DK" smtClean="0"/>
-              <a:t>12-06-2026</a:t>
+              <a:t>15-06-2026</a:t>
             </a:fld>
             <a:endParaRPr lang="da-DK"/>
           </a:p>
@@ -3950,7 +5163,7 @@
           <a:p>
             <a:fld id="{FE231444-B6D6-4C94-B78B-EDF9BDA6F4B0}" type="datetimeFigureOut">
               <a:rPr lang="da-DK" smtClean="0"/>
-              <a:t>12-06-2026</a:t>
+              <a:t>15-06-2026</a:t>
             </a:fld>
             <a:endParaRPr lang="da-DK"/>
           </a:p>
@@ -4045,7 +5258,7 @@
           <a:p>
             <a:fld id="{FE231444-B6D6-4C94-B78B-EDF9BDA6F4B0}" type="datetimeFigureOut">
               <a:rPr lang="da-DK" smtClean="0"/>
-              <a:t>12-06-2026</a:t>
+              <a:t>15-06-2026</a:t>
             </a:fld>
             <a:endParaRPr lang="da-DK"/>
           </a:p>
@@ -4300,7 +5513,7 @@
           <a:p>
             <a:fld id="{FE231444-B6D6-4C94-B78B-EDF9BDA6F4B0}" type="datetimeFigureOut">
               <a:rPr lang="da-DK" smtClean="0"/>
-              <a:t>12-06-2026</a:t>
+              <a:t>15-06-2026</a:t>
             </a:fld>
             <a:endParaRPr lang="da-DK"/>
           </a:p>
@@ -4563,7 +5776,7 @@
           <a:p>
             <a:fld id="{FE231444-B6D6-4C94-B78B-EDF9BDA6F4B0}" type="datetimeFigureOut">
               <a:rPr lang="da-DK" smtClean="0"/>
-              <a:t>12-06-2026</a:t>
+              <a:t>15-06-2026</a:t>
             </a:fld>
             <a:endParaRPr lang="da-DK"/>
           </a:p>
@@ -4796,6 +6009,13 @@
               <a:schemeClr val="lt1"/>
             </a:fontRef>
           </p:style>
+          <p:txBody>
+            <a:bodyPr/>
+            <a:lstStyle/>
+            <a:p>
+              <a:endParaRPr lang="da-DK"/>
+            </a:p>
+          </p:txBody>
         </p:sp>
         <p:sp>
           <p:nvSpPr>
@@ -4859,6 +6079,13 @@
               <a:schemeClr val="lt1"/>
             </a:fontRef>
           </p:style>
+          <p:txBody>
+            <a:bodyPr/>
+            <a:lstStyle/>
+            <a:p>
+              <a:endParaRPr lang="da-DK"/>
+            </a:p>
+          </p:txBody>
         </p:sp>
         <p:sp>
           <p:nvSpPr>
@@ -4900,6 +6127,13 @@
               <a:schemeClr val="lt1"/>
             </a:fontRef>
           </p:style>
+          <p:txBody>
+            <a:bodyPr/>
+            <a:lstStyle/>
+            <a:p>
+              <a:endParaRPr lang="da-DK"/>
+            </a:p>
+          </p:txBody>
         </p:sp>
         <p:sp>
           <p:nvSpPr>
@@ -4964,6 +6198,13 @@
               <a:schemeClr val="lt1"/>
             </a:fontRef>
           </p:style>
+          <p:txBody>
+            <a:bodyPr/>
+            <a:lstStyle/>
+            <a:p>
+              <a:endParaRPr lang="da-DK"/>
+            </a:p>
+          </p:txBody>
         </p:sp>
         <p:sp>
           <p:nvSpPr>
@@ -5029,6 +6270,13 @@
               <a:schemeClr val="lt1"/>
             </a:fontRef>
           </p:style>
+          <p:txBody>
+            <a:bodyPr/>
+            <a:lstStyle/>
+            <a:p>
+              <a:endParaRPr lang="da-DK"/>
+            </a:p>
+          </p:txBody>
         </p:sp>
         <p:sp>
           <p:nvSpPr>
@@ -5092,6 +6340,13 @@
               <a:schemeClr val="lt1"/>
             </a:fontRef>
           </p:style>
+          <p:txBody>
+            <a:bodyPr/>
+            <a:lstStyle/>
+            <a:p>
+              <a:endParaRPr lang="da-DK"/>
+            </a:p>
+          </p:txBody>
         </p:sp>
         <p:sp>
           <p:nvSpPr>
@@ -5133,6 +6388,13 @@
               <a:schemeClr val="lt1"/>
             </a:fontRef>
           </p:style>
+          <p:txBody>
+            <a:bodyPr/>
+            <a:lstStyle/>
+            <a:p>
+              <a:endParaRPr lang="da-DK"/>
+            </a:p>
+          </p:txBody>
         </p:sp>
         <p:sp>
           <p:nvSpPr>
@@ -5174,6 +6436,13 @@
               <a:schemeClr val="lt1"/>
             </a:fontRef>
           </p:style>
+          <p:txBody>
+            <a:bodyPr/>
+            <a:lstStyle/>
+            <a:p>
+              <a:endParaRPr lang="da-DK"/>
+            </a:p>
+          </p:txBody>
         </p:sp>
       </p:grpSp>
       <p:sp>
@@ -5306,7 +6575,7 @@
           <a:p>
             <a:fld id="{FE231444-B6D6-4C94-B78B-EDF9BDA6F4B0}" type="datetimeFigureOut">
               <a:rPr lang="da-DK" smtClean="0"/>
-              <a:t>12-06-2026</a:t>
+              <a:t>15-06-2026</a:t>
             </a:fld>
             <a:endParaRPr lang="da-DK"/>
           </a:p>
@@ -5846,16 +7115,25 @@
             <p:ph type="ctrTitle"/>
           </p:nvPr>
         </p:nvSpPr>
-        <p:spPr/>
+        <p:spPr>
+          <a:xfrm>
+            <a:off x="1026241" y="1179326"/>
+            <a:ext cx="8728587" cy="1646302"/>
+          </a:xfrm>
+        </p:spPr>
         <p:txBody>
           <a:bodyPr/>
           <a:lstStyle/>
           <a:p>
-            <a:r>
-              <a:rPr lang="da-DK" dirty="0" err="1"/>
-              <a:t>BookRight</a:t>
-            </a:r>
-            <a:endParaRPr lang="da-DK" dirty="0"/>
+            <a:pPr>
+              <a:lnSpc>
+                <a:spcPct val="150000"/>
+              </a:lnSpc>
+            </a:pPr>
+            <a:r>
+              <a:rPr lang="da-DK" dirty="0"/>
+              <a:t>BookRight Klinik &amp; Wellness </a:t>
+            </a:r>
           </a:p>
         </p:txBody>
       </p:sp>
@@ -5875,14 +7153,30 @@
             <p:ph type="subTitle" idx="1"/>
           </p:nvPr>
         </p:nvSpPr>
-        <p:spPr/>
-        <p:txBody>
-          <a:bodyPr/>
+        <p:spPr>
+          <a:xfrm>
+            <a:off x="5239639" y="3429000"/>
+            <a:ext cx="4515189" cy="1310148"/>
+          </a:xfrm>
+        </p:spPr>
+        <p:txBody>
+          <a:bodyPr>
+            <a:normAutofit/>
+          </a:bodyPr>
           <a:lstStyle/>
           <a:p>
             <a:r>
               <a:rPr lang="da-DK" dirty="0"/>
-              <a:t>Kirstine, Henrik, Nicolai og Christian</a:t>
+              <a:t>Kirstine, Henrik, Nicolai H. og Christian F.</a:t>
+            </a:r>
+          </a:p>
+          <a:p>
+            <a:endParaRPr lang="da-DK" dirty="0"/>
+          </a:p>
+          <a:p>
+            <a:r>
+              <a:rPr lang="da-DK" dirty="0"/>
+              <a:t>				Datamatiker - DMVE251 </a:t>
             </a:r>
           </a:p>
           <a:p>
@@ -5894,6 +7188,365 @@
     <p:extLst>
       <p:ext uri="{BB962C8B-B14F-4D97-AF65-F5344CB8AC3E}">
         <p14:creationId xmlns:p14="http://schemas.microsoft.com/office/powerpoint/2010/main" val="2225794900"/>
+      </p:ext>
+    </p:extLst>
+  </p:cSld>
+  <p:clrMapOvr>
+    <a:masterClrMapping/>
+  </p:clrMapOvr>
+</p:sld>
+</file>
+
+<file path=ppt/slides/slide10.xml><?xml version="1.0" encoding="utf-8"?>
+<p:sld xmlns:a="http://schemas.openxmlformats.org/drawingml/2006/main" xmlns:r="http://schemas.openxmlformats.org/officeDocument/2006/relationships" xmlns:p="http://schemas.openxmlformats.org/presentationml/2006/main">
+  <p:cSld>
+    <p:spTree>
+      <p:nvGrpSpPr>
+        <p:cNvPr id="1" name=""/>
+        <p:cNvGrpSpPr/>
+        <p:nvPr/>
+      </p:nvGrpSpPr>
+      <p:grpSpPr>
+        <a:xfrm>
+          <a:off x="0" y="0"/>
+          <a:ext cx="0" cy="0"/>
+          <a:chOff x="0" y="0"/>
+          <a:chExt cx="0" cy="0"/>
+        </a:xfrm>
+      </p:grpSpPr>
+      <p:sp>
+        <p:nvSpPr>
+          <p:cNvPr id="2" name="Titel 1">
+            <a:extLst>
+              <a:ext uri="{FF2B5EF4-FFF2-40B4-BE49-F238E27FC236}">
+                <a16:creationId xmlns:a16="http://schemas.microsoft.com/office/drawing/2014/main" id="{28A9CEA7-05E9-4B4D-7B78-FD1B6DA474C1}"/>
+              </a:ext>
+            </a:extLst>
+          </p:cNvPr>
+          <p:cNvSpPr>
+            <a:spLocks noGrp="1"/>
+          </p:cNvSpPr>
+          <p:nvPr>
+            <p:ph type="title"/>
+          </p:nvPr>
+        </p:nvSpPr>
+        <p:spPr>
+          <a:xfrm>
+            <a:off x="677334" y="609599"/>
+            <a:ext cx="8596668" cy="865239"/>
+          </a:xfrm>
+        </p:spPr>
+        <p:txBody>
+          <a:bodyPr/>
+          <a:lstStyle/>
+          <a:p>
+            <a:r>
+              <a:rPr lang="da-DK" dirty="0"/>
+              <a:t>Perspektivering</a:t>
+            </a:r>
+          </a:p>
+        </p:txBody>
+      </p:sp>
+      <p:sp>
+        <p:nvSpPr>
+          <p:cNvPr id="3" name="Pladsholder til indhold 2">
+            <a:extLst>
+              <a:ext uri="{FF2B5EF4-FFF2-40B4-BE49-F238E27FC236}">
+                <a16:creationId xmlns:a16="http://schemas.microsoft.com/office/drawing/2014/main" id="{1686E3D8-7134-4F38-B308-059D6A10A227}"/>
+              </a:ext>
+            </a:extLst>
+          </p:cNvPr>
+          <p:cNvSpPr>
+            <a:spLocks noGrp="1"/>
+          </p:cNvSpPr>
+          <p:nvPr>
+            <p:ph idx="1"/>
+          </p:nvPr>
+        </p:nvSpPr>
+        <p:spPr>
+          <a:xfrm>
+            <a:off x="677334" y="1306396"/>
+            <a:ext cx="8596668" cy="5383162"/>
+          </a:xfrm>
+        </p:spPr>
+        <p:txBody>
+          <a:bodyPr>
+            <a:normAutofit fontScale="77500" lnSpcReduction="20000"/>
+          </a:bodyPr>
+          <a:lstStyle/>
+          <a:p>
+            <a:r>
+              <a:rPr lang="da-DK" sz="2100" dirty="0"/>
+              <a:t>Mest oplagte videreudviklingstiltag:  </a:t>
+            </a:r>
+          </a:p>
+          <a:p>
+            <a:pPr lvl="1"/>
+            <a:r>
+              <a:rPr lang="da-DK" sz="2100" dirty="0"/>
+              <a:t>Liste problemer</a:t>
+            </a:r>
+          </a:p>
+          <a:p>
+            <a:pPr lvl="1"/>
+            <a:r>
+              <a:rPr lang="da-DK" sz="2100" dirty="0"/>
+              <a:t>Fikse flere kald til databasen samtidigt</a:t>
+            </a:r>
+          </a:p>
+          <a:p>
+            <a:pPr lvl="1"/>
+            <a:r>
+              <a:rPr lang="da-DK" sz="2100" dirty="0"/>
+              <a:t>Kalender- og belægningsoverblik</a:t>
+            </a:r>
+          </a:p>
+          <a:p>
+            <a:pPr lvl="1"/>
+            <a:r>
+              <a:rPr lang="da-DK" sz="2100" dirty="0"/>
+              <a:t>Rapport funktion</a:t>
+            </a:r>
+          </a:p>
+          <a:p>
+            <a:pPr lvl="1"/>
+            <a:r>
+              <a:rPr lang="da-DK" sz="2100" dirty="0"/>
+              <a:t>Betaling og fakturering</a:t>
+            </a:r>
+          </a:p>
+          <a:p>
+            <a:pPr lvl="1"/>
+            <a:r>
+              <a:rPr lang="da-DK" sz="2100" dirty="0"/>
+              <a:t>Flere </a:t>
+            </a:r>
+            <a:r>
+              <a:rPr lang="da-DK" sz="2100" dirty="0" err="1"/>
+              <a:t>Queries</a:t>
+            </a:r>
+            <a:r>
+              <a:rPr lang="da-DK" sz="2100" dirty="0"/>
+              <a:t> og </a:t>
+            </a:r>
+            <a:r>
+              <a:rPr lang="da-DK" sz="2100" dirty="0" err="1"/>
+              <a:t>DTO’er</a:t>
+            </a:r>
+            <a:endParaRPr lang="da-DK" sz="2100" dirty="0"/>
+          </a:p>
+          <a:p>
+            <a:pPr lvl="1"/>
+            <a:r>
+              <a:rPr lang="da-DK" sz="2100" dirty="0" err="1"/>
+              <a:t>Strongly</a:t>
+            </a:r>
+            <a:r>
+              <a:rPr lang="da-DK" sz="2100" dirty="0"/>
+              <a:t> </a:t>
+            </a:r>
+            <a:r>
+              <a:rPr lang="da-DK" sz="2100" dirty="0" err="1"/>
+              <a:t>Typed</a:t>
+            </a:r>
+            <a:r>
+              <a:rPr lang="da-DK" sz="2100" dirty="0"/>
+              <a:t> </a:t>
+            </a:r>
+            <a:r>
+              <a:rPr lang="da-DK" sz="2100" dirty="0" err="1"/>
+              <a:t>ID’s</a:t>
+            </a:r>
+            <a:endParaRPr lang="da-DK" sz="2100" dirty="0"/>
+          </a:p>
+          <a:p>
+            <a:pPr lvl="1"/>
+            <a:r>
+              <a:rPr lang="da-DK" sz="2100" dirty="0"/>
+              <a:t>Grøn IT</a:t>
+            </a:r>
+          </a:p>
+          <a:p>
+            <a:pPr lvl="1"/>
+            <a:r>
+              <a:rPr lang="da-DK" sz="2100" dirty="0"/>
+              <a:t>IT </a:t>
+            </a:r>
+            <a:r>
+              <a:rPr lang="da-DK" sz="2100" dirty="0" err="1"/>
+              <a:t>Governance</a:t>
+            </a:r>
+            <a:endParaRPr lang="da-DK" sz="2100" dirty="0"/>
+          </a:p>
+          <a:p>
+            <a:r>
+              <a:rPr lang="da-DK" sz="2100" dirty="0"/>
+              <a:t>Gruppesamarbejdet:</a:t>
+            </a:r>
+          </a:p>
+          <a:p>
+            <a:pPr lvl="1"/>
+            <a:r>
+              <a:rPr lang="da-DK" sz="2100" dirty="0"/>
+              <a:t>Forventningsafstemme</a:t>
+            </a:r>
+          </a:p>
+          <a:p>
+            <a:pPr lvl="1"/>
+            <a:r>
+              <a:rPr lang="da-DK" sz="2100" dirty="0"/>
+              <a:t>Kommunikationsudfordringer</a:t>
+            </a:r>
+          </a:p>
+          <a:p>
+            <a:pPr lvl="2"/>
+            <a:r>
+              <a:rPr lang="da-DK" sz="2100" dirty="0"/>
+              <a:t>Åbenhed omkring tvivl, fejl og behov for faglig sparring</a:t>
+            </a:r>
+          </a:p>
+          <a:p>
+            <a:pPr lvl="1"/>
+            <a:r>
+              <a:rPr lang="da-DK" sz="2100" dirty="0"/>
+              <a:t>Kvalitetssikring</a:t>
+            </a:r>
+          </a:p>
+          <a:p>
+            <a:pPr lvl="1"/>
+            <a:r>
+              <a:rPr lang="da-DK" sz="2100" dirty="0"/>
+              <a:t>Mere feature betonet SCRUM </a:t>
+            </a:r>
+            <a:r>
+              <a:rPr lang="da-DK" sz="2100" dirty="0" err="1"/>
+              <a:t>process</a:t>
+            </a:r>
+            <a:endParaRPr lang="da-DK" sz="2100" dirty="0"/>
+          </a:p>
+          <a:p>
+            <a:pPr marL="0" indent="0">
+              <a:buNone/>
+            </a:pPr>
+            <a:endParaRPr lang="da-DK" dirty="0"/>
+          </a:p>
+        </p:txBody>
+      </p:sp>
+    </p:spTree>
+    <p:extLst>
+      <p:ext uri="{BB962C8B-B14F-4D97-AF65-F5344CB8AC3E}">
+        <p14:creationId xmlns:p14="http://schemas.microsoft.com/office/powerpoint/2010/main" val="960325152"/>
+      </p:ext>
+    </p:extLst>
+  </p:cSld>
+  <p:clrMapOvr>
+    <a:masterClrMapping/>
+  </p:clrMapOvr>
+</p:sld>
+</file>
+
+<file path=ppt/slides/slide11.xml><?xml version="1.0" encoding="utf-8"?>
+<p:sld xmlns:a="http://schemas.openxmlformats.org/drawingml/2006/main" xmlns:r="http://schemas.openxmlformats.org/officeDocument/2006/relationships" xmlns:p="http://schemas.openxmlformats.org/presentationml/2006/main">
+  <p:cSld>
+    <p:spTree>
+      <p:nvGrpSpPr>
+        <p:cNvPr id="1" name=""/>
+        <p:cNvGrpSpPr/>
+        <p:nvPr/>
+      </p:nvGrpSpPr>
+      <p:grpSpPr>
+        <a:xfrm>
+          <a:off x="0" y="0"/>
+          <a:ext cx="0" cy="0"/>
+          <a:chOff x="0" y="0"/>
+          <a:chExt cx="0" cy="0"/>
+        </a:xfrm>
+      </p:grpSpPr>
+      <p:sp>
+        <p:nvSpPr>
+          <p:cNvPr id="2" name="Titel 1">
+            <a:extLst>
+              <a:ext uri="{FF2B5EF4-FFF2-40B4-BE49-F238E27FC236}">
+                <a16:creationId xmlns:a16="http://schemas.microsoft.com/office/drawing/2014/main" id="{688DDE1B-0014-7F96-3C88-6639F9C7FCE5}"/>
+              </a:ext>
+            </a:extLst>
+          </p:cNvPr>
+          <p:cNvSpPr>
+            <a:spLocks noGrp="1"/>
+          </p:cNvSpPr>
+          <p:nvPr>
+            <p:ph type="title"/>
+          </p:nvPr>
+        </p:nvSpPr>
+        <p:spPr/>
+        <p:txBody>
+          <a:bodyPr/>
+          <a:lstStyle/>
+          <a:p>
+            <a:r>
+              <a:rPr lang="da-DK" dirty="0"/>
+              <a:t>Konklusion</a:t>
+            </a:r>
+          </a:p>
+        </p:txBody>
+      </p:sp>
+      <p:sp>
+        <p:nvSpPr>
+          <p:cNvPr id="3" name="Pladsholder til indhold 2">
+            <a:extLst>
+              <a:ext uri="{FF2B5EF4-FFF2-40B4-BE49-F238E27FC236}">
+                <a16:creationId xmlns:a16="http://schemas.microsoft.com/office/drawing/2014/main" id="{5AC798E4-3D73-46AC-7BC7-0DE58ABB5708}"/>
+              </a:ext>
+            </a:extLst>
+          </p:cNvPr>
+          <p:cNvSpPr>
+            <a:spLocks noGrp="1"/>
+          </p:cNvSpPr>
+          <p:nvPr>
+            <p:ph idx="1"/>
+          </p:nvPr>
+        </p:nvSpPr>
+        <p:spPr/>
+        <p:txBody>
+          <a:bodyPr/>
+          <a:lstStyle/>
+          <a:p>
+            <a:r>
+              <a:rPr lang="da-DK" dirty="0"/>
+              <a:t>Projektet resulterer i et fungerende grundsystem og den udviklede prototype har skabt grundlag for bl.a.:</a:t>
+            </a:r>
+          </a:p>
+          <a:p>
+            <a:pPr lvl="1"/>
+            <a:r>
+              <a:rPr lang="da-DK" dirty="0"/>
+              <a:t>En mere struktureret bookinghåndtering, prisberegning og valideringer</a:t>
+            </a:r>
+          </a:p>
+          <a:p>
+            <a:endParaRPr lang="da-DK" dirty="0"/>
+          </a:p>
+          <a:p>
+            <a:r>
+              <a:rPr lang="da-DK" dirty="0"/>
+              <a:t>Faglig udvikling</a:t>
+            </a:r>
+          </a:p>
+          <a:p>
+            <a:endParaRPr lang="da-DK" dirty="0"/>
+          </a:p>
+          <a:p>
+            <a:r>
+              <a:rPr lang="da-DK" dirty="0"/>
+              <a:t>Udfordringerne betragtes ikke alene som problemer, men som erfaringer til fremtidige projekter.</a:t>
+            </a:r>
+          </a:p>
+        </p:txBody>
+      </p:sp>
+    </p:spTree>
+    <p:extLst>
+      <p:ext uri="{BB962C8B-B14F-4D97-AF65-F5344CB8AC3E}">
+        <p14:creationId xmlns:p14="http://schemas.microsoft.com/office/powerpoint/2010/main" val="3978484354"/>
       </p:ext>
     </p:extLst>
   </p:cSld>
@@ -5925,7 +7578,7 @@
           <p:cNvPr id="2" name="Titel 1">
             <a:extLst>
               <a:ext uri="{FF2B5EF4-FFF2-40B4-BE49-F238E27FC236}">
-                <a16:creationId xmlns:a16="http://schemas.microsoft.com/office/drawing/2014/main" id="{E487B870-9282-91A8-1AD9-D5F90C81594A}"/>
+                <a16:creationId xmlns:a16="http://schemas.microsoft.com/office/drawing/2014/main" id="{BC22B957-5B94-514B-2C9C-F0F8BE20D7A6}"/>
               </a:ext>
             </a:extLst>
           </p:cNvPr>
@@ -5942,9 +7595,10 @@
           <a:lstStyle/>
           <a:p>
             <a:r>
-              <a:rPr lang="da-DK" dirty="0"/>
-              <a:t>Introduktion og Problemstilling</a:t>
-            </a:r>
+              <a:rPr lang="da-DK" sz="4000" dirty="0"/>
+              <a:t>Agenda</a:t>
+            </a:r>
+            <a:endParaRPr lang="da-DK" dirty="0"/>
           </a:p>
         </p:txBody>
       </p:sp>
@@ -5953,7 +7607,7 @@
           <p:cNvPr id="3" name="Pladsholder til indhold 2">
             <a:extLst>
               <a:ext uri="{FF2B5EF4-FFF2-40B4-BE49-F238E27FC236}">
-                <a16:creationId xmlns:a16="http://schemas.microsoft.com/office/drawing/2014/main" id="{FE59520C-F70E-2427-8933-3F99AE4918B8}"/>
+                <a16:creationId xmlns:a16="http://schemas.microsoft.com/office/drawing/2014/main" id="{F17D0349-48DF-0F0D-A924-5AF09403989F}"/>
               </a:ext>
             </a:extLst>
           </p:cNvPr>
@@ -5970,30 +7624,9 @@
           <a:lstStyle/>
           <a:p>
             <a:r>
-              <a:rPr lang="da-DK" dirty="0" err="1"/>
-              <a:t>BookRight</a:t>
-            </a:r>
-            <a:endParaRPr lang="da-DK" dirty="0"/>
-          </a:p>
-          <a:p>
-            <a:pPr lvl="1"/>
-            <a:r>
               <a:rPr lang="da-DK" dirty="0"/>
-              <a:t>Wellnessvirksomhed</a:t>
-            </a:r>
-          </a:p>
-          <a:p>
-            <a:pPr lvl="1"/>
-            <a:r>
-              <a:rPr lang="da-DK" dirty="0"/>
-              <a:t>Oplever vækst</a:t>
-            </a:r>
-          </a:p>
-          <a:p>
-            <a:pPr marL="457200" lvl="1" indent="0">
-              <a:buNone/>
-            </a:pPr>
-            <a:endParaRPr lang="da-DK" dirty="0"/>
+              <a:t>Introduktion</a:t>
+            </a:r>
           </a:p>
           <a:p>
             <a:r>
@@ -6002,24 +7635,45 @@
             </a:r>
           </a:p>
           <a:p>
-            <a:pPr lvl="1"/>
             <a:r>
               <a:rPr lang="da-DK" dirty="0"/>
-              <a:t>Manuelle processer</a:t>
-            </a:r>
-          </a:p>
-          <a:p>
-            <a:pPr lvl="2"/>
+              <a:t>Scrum som systemudviklingsmetode</a:t>
+            </a:r>
+          </a:p>
+          <a:p>
             <a:r>
               <a:rPr lang="da-DK" dirty="0"/>
-              <a:t>telefonisk, fælles regneark og postes</a:t>
-            </a:r>
-          </a:p>
-          <a:p>
-            <a:pPr lvl="2"/>
+              <a:t>Forretningsanalyse</a:t>
+            </a:r>
+          </a:p>
+          <a:p>
             <a:r>
               <a:rPr lang="da-DK" dirty="0"/>
-              <a:t>Dobbeltbookinger, manglende overblik, tidskrævende administration og tabte aftaler</a:t>
+              <a:t>Kravspecifikation</a:t>
+            </a:r>
+          </a:p>
+          <a:p>
+            <a:r>
+              <a:rPr lang="da-DK" dirty="0"/>
+              <a:t>Diagrammer</a:t>
+            </a:r>
+          </a:p>
+          <a:p>
+            <a:r>
+              <a:rPr lang="da-DK" dirty="0"/>
+              <a:t>Køre programmet</a:t>
+            </a:r>
+          </a:p>
+          <a:p>
+            <a:r>
+              <a:rPr lang="da-DK" dirty="0"/>
+              <a:t>Perspektivering</a:t>
+            </a:r>
+          </a:p>
+          <a:p>
+            <a:r>
+              <a:rPr lang="da-DK" dirty="0"/>
+              <a:t>Konklusion</a:t>
             </a:r>
           </a:p>
         </p:txBody>
@@ -6027,7 +7681,7 @@
     </p:spTree>
     <p:extLst>
       <p:ext uri="{BB962C8B-B14F-4D97-AF65-F5344CB8AC3E}">
-        <p14:creationId xmlns:p14="http://schemas.microsoft.com/office/powerpoint/2010/main" val="854620849"/>
+        <p14:creationId xmlns:p14="http://schemas.microsoft.com/office/powerpoint/2010/main" val="2290430336"/>
       </p:ext>
     </p:extLst>
   </p:cSld>
@@ -6059,7 +7713,7 @@
           <p:cNvPr id="2" name="Titel 1">
             <a:extLst>
               <a:ext uri="{FF2B5EF4-FFF2-40B4-BE49-F238E27FC236}">
-                <a16:creationId xmlns:a16="http://schemas.microsoft.com/office/drawing/2014/main" id="{96E823AF-E149-59E0-A77B-2F7492686043}"/>
+                <a16:creationId xmlns:a16="http://schemas.microsoft.com/office/drawing/2014/main" id="{E487B870-9282-91A8-1AD9-D5F90C81594A}"/>
               </a:ext>
             </a:extLst>
           </p:cNvPr>
@@ -6072,20 +7726,14 @@
         </p:nvSpPr>
         <p:spPr/>
         <p:txBody>
-          <a:bodyPr/>
-          <a:lstStyle/>
-          <a:p>
-            <a:r>
-              <a:rPr lang="da-DK" dirty="0"/>
-              <a:t>Modificeret </a:t>
-            </a:r>
-            <a:r>
-              <a:rPr lang="da-DK" dirty="0" err="1"/>
-              <a:t>Scrum</a:t>
-            </a:r>
-            <a:r>
-              <a:rPr lang="da-DK" dirty="0"/>
-              <a:t> som systemudviklingsmetode</a:t>
+          <a:bodyPr>
+            <a:normAutofit/>
+          </a:bodyPr>
+          <a:lstStyle/>
+          <a:p>
+            <a:r>
+              <a:rPr lang="da-DK" sz="4000" dirty="0"/>
+              <a:t>Introduktion</a:t>
             </a:r>
           </a:p>
         </p:txBody>
@@ -6095,7 +7743,7 @@
           <p:cNvPr id="3" name="Pladsholder til indhold 2">
             <a:extLst>
               <a:ext uri="{FF2B5EF4-FFF2-40B4-BE49-F238E27FC236}">
-                <a16:creationId xmlns:a16="http://schemas.microsoft.com/office/drawing/2014/main" id="{BDD24B45-31AB-3B61-E665-B8199DF9326C}"/>
+                <a16:creationId xmlns:a16="http://schemas.microsoft.com/office/drawing/2014/main" id="{FE59520C-F70E-2427-8933-3F99AE4918B8}"/>
               </a:ext>
             </a:extLst>
           </p:cNvPr>
@@ -6106,55 +7754,125 @@
             <p:ph idx="1"/>
           </p:nvPr>
         </p:nvSpPr>
-        <p:spPr/>
-        <p:txBody>
-          <a:bodyPr/>
-          <a:lstStyle/>
-          <a:p>
-            <a:r>
-              <a:rPr lang="da-DK" dirty="0" err="1"/>
-              <a:t>Scrum</a:t>
-            </a:r>
+        <p:spPr>
+          <a:xfrm>
+            <a:off x="677334" y="1633620"/>
+            <a:ext cx="10029996" cy="4927601"/>
+          </a:xfrm>
+        </p:spPr>
+        <p:txBody>
+          <a:bodyPr>
+            <a:noAutofit/>
+          </a:bodyPr>
+          <a:lstStyle/>
+          <a:p>
+            <a:pPr>
+              <a:lnSpc>
+                <a:spcPct val="150000"/>
+              </a:lnSpc>
+            </a:pPr>
+            <a:r>
+              <a:rPr lang="da-DK" sz="1600" dirty="0"/>
+              <a:t>BookRight Klinik &amp; Wellness ApS </a:t>
+            </a:r>
+          </a:p>
+          <a:p>
+            <a:pPr lvl="1">
+              <a:lnSpc>
+                <a:spcPct val="150000"/>
+              </a:lnSpc>
+            </a:pPr>
             <a:r>
               <a:rPr lang="da-DK" dirty="0"/>
-              <a:t> master</a:t>
-            </a:r>
-          </a:p>
-          <a:p>
-            <a:pPr lvl="1"/>
+              <a:t>Wellnessvirksomhed</a:t>
+            </a:r>
+          </a:p>
+          <a:p>
+            <a:pPr lvl="2">
+              <a:lnSpc>
+                <a:spcPct val="150000"/>
+              </a:lnSpc>
+            </a:pPr>
+            <a:r>
+              <a:rPr lang="da-DK" sz="1600" dirty="0"/>
+              <a:t>3 klinikker i Vejle-området</a:t>
+            </a:r>
+          </a:p>
+          <a:p>
+            <a:pPr lvl="2">
+              <a:lnSpc>
+                <a:spcPct val="150000"/>
+              </a:lnSpc>
+            </a:pPr>
+            <a:r>
+              <a:rPr lang="da-DK" sz="1600" dirty="0"/>
+              <a:t>1 receptionist</a:t>
+            </a:r>
+          </a:p>
+          <a:p>
+            <a:pPr lvl="2">
+              <a:lnSpc>
+                <a:spcPct val="150000"/>
+              </a:lnSpc>
+            </a:pPr>
+            <a:r>
+              <a:rPr lang="da-DK" sz="1600" dirty="0"/>
+              <a:t>12 Behandlere</a:t>
+            </a:r>
+          </a:p>
+          <a:p>
+            <a:pPr lvl="2">
+              <a:lnSpc>
+                <a:spcPct val="150000"/>
+              </a:lnSpc>
+            </a:pPr>
+            <a:r>
+              <a:rPr lang="da-DK" sz="1600" dirty="0"/>
+              <a:t>5 Behandlingstyper</a:t>
+            </a:r>
+          </a:p>
+          <a:p>
+            <a:pPr lvl="3">
+              <a:lnSpc>
+                <a:spcPct val="150000"/>
+              </a:lnSpc>
+            </a:pPr>
+            <a:r>
+              <a:rPr lang="da-DK" sz="1600" dirty="0"/>
+              <a:t>Fysioterapi, Sportsmassage, Akupunktur, Kostvejledning, Holdtræning/genoptræning</a:t>
+            </a:r>
+          </a:p>
+          <a:p>
+            <a:pPr lvl="1">
+              <a:lnSpc>
+                <a:spcPct val="150000"/>
+              </a:lnSpc>
+            </a:pPr>
             <a:r>
               <a:rPr lang="da-DK" dirty="0"/>
-              <a:t>Sprints: 6 af 1 uges varighed</a:t>
-            </a:r>
-          </a:p>
-          <a:p>
-            <a:pPr lvl="1"/>
-            <a:r>
-              <a:rPr lang="da-DK" dirty="0"/>
-              <a:t>Fredag: Sprint Review og Sprint </a:t>
-            </a:r>
-            <a:r>
-              <a:rPr lang="da-DK" dirty="0" err="1"/>
-              <a:t>Retrospective</a:t>
-            </a:r>
-            <a:endParaRPr lang="da-DK" dirty="0"/>
-          </a:p>
-          <a:p>
-            <a:pPr lvl="1"/>
-            <a:r>
-              <a:rPr lang="da-DK" dirty="0"/>
-              <a:t>Mandag: Sprint Planning</a:t>
-            </a:r>
-          </a:p>
-          <a:p>
-            <a:pPr lvl="1"/>
-            <a:r>
-              <a:rPr lang="da-DK" dirty="0" err="1"/>
-              <a:t>Daily</a:t>
-            </a:r>
-            <a:r>
-              <a:rPr lang="da-DK" dirty="0"/>
-              <a:t> standups</a:t>
+              <a:t>Oplever vækst</a:t>
+            </a:r>
+          </a:p>
+          <a:p>
+            <a:pPr lvl="2">
+              <a:lnSpc>
+                <a:spcPct val="150000"/>
+              </a:lnSpc>
+            </a:pPr>
+            <a:r>
+              <a:rPr lang="da-DK" sz="1600" dirty="0"/>
+              <a:t>Ca. 400 kunder månedligt</a:t>
+            </a:r>
+          </a:p>
+          <a:p>
+            <a:pPr lvl="2">
+              <a:lnSpc>
+                <a:spcPct val="150000"/>
+              </a:lnSpc>
+            </a:pPr>
+            <a:r>
+              <a:rPr lang="da-DK" sz="1600" dirty="0"/>
+              <a:t>Forventer en fjerde klinik inden for det kommende år</a:t>
             </a:r>
           </a:p>
         </p:txBody>
@@ -6162,7 +7880,7 @@
     </p:spTree>
     <p:extLst>
       <p:ext uri="{BB962C8B-B14F-4D97-AF65-F5344CB8AC3E}">
-        <p14:creationId xmlns:p14="http://schemas.microsoft.com/office/powerpoint/2010/main" val="213061080"/>
+        <p14:creationId xmlns:p14="http://schemas.microsoft.com/office/powerpoint/2010/main" val="854620849"/>
       </p:ext>
     </p:extLst>
   </p:cSld>
@@ -6194,7 +7912,7 @@
           <p:cNvPr id="2" name="Titel 1">
             <a:extLst>
               <a:ext uri="{FF2B5EF4-FFF2-40B4-BE49-F238E27FC236}">
-                <a16:creationId xmlns:a16="http://schemas.microsoft.com/office/drawing/2014/main" id="{9E74DE2C-1FF1-2B30-6BDF-99CC119A900C}"/>
+                <a16:creationId xmlns:a16="http://schemas.microsoft.com/office/drawing/2014/main" id="{BA11A555-C21E-8BD3-90E8-555113C44205}"/>
               </a:ext>
             </a:extLst>
           </p:cNvPr>
@@ -6211,9 +7929,10 @@
           <a:lstStyle/>
           <a:p>
             <a:r>
-              <a:rPr lang="da-DK" dirty="0"/>
-              <a:t>Forretningsanalyse</a:t>
-            </a:r>
+              <a:rPr lang="da-DK" sz="4000" dirty="0"/>
+              <a:t>Problemstilling</a:t>
+            </a:r>
+            <a:endParaRPr lang="da-DK" dirty="0"/>
           </a:p>
         </p:txBody>
       </p:sp>
@@ -6222,7 +7941,7 @@
           <p:cNvPr id="3" name="Pladsholder til indhold 2">
             <a:extLst>
               <a:ext uri="{FF2B5EF4-FFF2-40B4-BE49-F238E27FC236}">
-                <a16:creationId xmlns:a16="http://schemas.microsoft.com/office/drawing/2014/main" id="{AA0FD022-F7C8-9F14-ACEC-751922ED85AA}"/>
+                <a16:creationId xmlns:a16="http://schemas.microsoft.com/office/drawing/2014/main" id="{3580D548-2392-7158-FDB6-FF34069372E0}"/>
               </a:ext>
             </a:extLst>
           </p:cNvPr>
@@ -6233,46 +7952,101 @@
             <p:ph idx="1"/>
           </p:nvPr>
         </p:nvSpPr>
-        <p:spPr/>
+        <p:spPr>
+          <a:xfrm>
+            <a:off x="677334" y="1930401"/>
+            <a:ext cx="9715364" cy="4578554"/>
+          </a:xfrm>
+        </p:spPr>
         <p:txBody>
           <a:bodyPr/>
           <a:lstStyle/>
           <a:p>
+            <a:pPr>
+              <a:lnSpc>
+                <a:spcPct val="150000"/>
+              </a:lnSpc>
+            </a:pPr>
+            <a:r>
+              <a:rPr lang="da-DK" sz="1600" dirty="0"/>
+              <a:t>Nuværende løsning</a:t>
+            </a:r>
+          </a:p>
+          <a:p>
+            <a:pPr lvl="1">
+              <a:lnSpc>
+                <a:spcPct val="150000"/>
+              </a:lnSpc>
+            </a:pPr>
             <a:r>
               <a:rPr lang="da-DK" dirty="0"/>
-              <a:t>AS-IS</a:t>
-            </a:r>
-          </a:p>
-          <a:p>
+              <a:t>Manuel proces baseret på en kombination af:</a:t>
+            </a:r>
+          </a:p>
+          <a:p>
+            <a:pPr lvl="2">
+              <a:lnSpc>
+                <a:spcPct val="150000"/>
+              </a:lnSpc>
+            </a:pPr>
+            <a:r>
+              <a:rPr lang="da-DK" sz="1600" dirty="0"/>
+              <a:t>Telefonisk booking, fælles regneark og håndskrevne noter i receptionen</a:t>
+            </a:r>
+          </a:p>
+          <a:p>
+            <a:pPr>
+              <a:lnSpc>
+                <a:spcPct val="150000"/>
+              </a:lnSpc>
+            </a:pPr>
+            <a:r>
+              <a:rPr lang="da-DK" sz="1600" dirty="0"/>
+              <a:t>Problematikker</a:t>
+            </a:r>
+          </a:p>
+          <a:p>
+            <a:pPr lvl="1">
+              <a:lnSpc>
+                <a:spcPct val="150000"/>
+              </a:lnSpc>
+            </a:pPr>
             <a:r>
               <a:rPr lang="da-DK" dirty="0"/>
-              <a:t>TO-BE</a:t>
-            </a:r>
-          </a:p>
-          <a:p>
-            <a:r>
-              <a:rPr lang="da-DK" dirty="0"/>
-              <a:t>SWOT</a:t>
-            </a:r>
-          </a:p>
-          <a:p>
-            <a:r>
-              <a:rPr lang="da-DK" dirty="0"/>
-              <a:t>Interessent</a:t>
-            </a:r>
-          </a:p>
-          <a:p>
-            <a:r>
-              <a:rPr lang="da-DK" dirty="0"/>
-              <a:t>Double-Diamant</a:t>
-            </a:r>
+              <a:t>Dobbeltbookinger, tabte aftaler, manglende opfølgning, manglende overblik og tidskrævende administration</a:t>
+            </a:r>
+          </a:p>
+          <a:p>
+            <a:pPr>
+              <a:lnSpc>
+                <a:spcPct val="150000"/>
+              </a:lnSpc>
+            </a:pPr>
+            <a:r>
+              <a:rPr lang="da-DK" sz="1600" dirty="0"/>
+              <a:t>Ca. 15 timers administration ugentligt</a:t>
+            </a:r>
+          </a:p>
+          <a:p>
+            <a:pPr>
+              <a:lnSpc>
+                <a:spcPct val="150000"/>
+              </a:lnSpc>
+            </a:pPr>
+            <a:r>
+              <a:rPr lang="da-DK" sz="1600" dirty="0"/>
+              <a:t>Estimeret tab på 8–10 %</a:t>
+            </a:r>
+          </a:p>
+          <a:p>
+            <a:endParaRPr lang="da-DK" dirty="0"/>
           </a:p>
         </p:txBody>
       </p:sp>
     </p:spTree>
     <p:extLst>
       <p:ext uri="{BB962C8B-B14F-4D97-AF65-F5344CB8AC3E}">
-        <p14:creationId xmlns:p14="http://schemas.microsoft.com/office/powerpoint/2010/main" val="2205776646"/>
+        <p14:creationId xmlns:p14="http://schemas.microsoft.com/office/powerpoint/2010/main" val="2712773404"/>
       </p:ext>
     </p:extLst>
   </p:cSld>
@@ -6304,7 +8078,7 @@
           <p:cNvPr id="2" name="Titel 1">
             <a:extLst>
               <a:ext uri="{FF2B5EF4-FFF2-40B4-BE49-F238E27FC236}">
-                <a16:creationId xmlns:a16="http://schemas.microsoft.com/office/drawing/2014/main" id="{9B588A41-528B-7C5D-5BE6-72A8DEF3ADF6}"/>
+                <a16:creationId xmlns:a16="http://schemas.microsoft.com/office/drawing/2014/main" id="{96E823AF-E149-59E0-A77B-2F7492686043}"/>
               </a:ext>
             </a:extLst>
           </p:cNvPr>
@@ -6317,12 +8091,14 @@
         </p:nvSpPr>
         <p:spPr/>
         <p:txBody>
-          <a:bodyPr/>
-          <a:lstStyle/>
-          <a:p>
-            <a:r>
-              <a:rPr lang="da-DK" dirty="0"/>
-              <a:t>Kravspecifikation</a:t>
+          <a:bodyPr>
+            <a:normAutofit/>
+          </a:bodyPr>
+          <a:lstStyle/>
+          <a:p>
+            <a:r>
+              <a:rPr lang="da-DK" sz="4000" dirty="0"/>
+              <a:t>Scrum som systemudviklingsmetode</a:t>
             </a:r>
           </a:p>
         </p:txBody>
@@ -6332,7 +8108,7 @@
           <p:cNvPr id="3" name="Pladsholder til indhold 2">
             <a:extLst>
               <a:ext uri="{FF2B5EF4-FFF2-40B4-BE49-F238E27FC236}">
-                <a16:creationId xmlns:a16="http://schemas.microsoft.com/office/drawing/2014/main" id="{85CB8F36-4FA0-7C8A-0674-711CABA23C38}"/>
+                <a16:creationId xmlns:a16="http://schemas.microsoft.com/office/drawing/2014/main" id="{BDD24B45-31AB-3B61-E665-B8199DF9326C}"/>
               </a:ext>
             </a:extLst>
           </p:cNvPr>
@@ -6343,39 +8119,111 @@
             <p:ph idx="1"/>
           </p:nvPr>
         </p:nvSpPr>
-        <p:spPr/>
-        <p:txBody>
-          <a:bodyPr/>
-          <a:lstStyle/>
-          <a:p>
+        <p:spPr>
+          <a:xfrm>
+            <a:off x="677334" y="1617580"/>
+            <a:ext cx="8977943" cy="4927599"/>
+          </a:xfrm>
+        </p:spPr>
+        <p:txBody>
+          <a:bodyPr>
+            <a:normAutofit/>
+          </a:bodyPr>
+          <a:lstStyle/>
+          <a:p>
+            <a:pPr>
+              <a:lnSpc>
+                <a:spcPct val="150000"/>
+              </a:lnSpc>
+            </a:pPr>
+            <a:r>
+              <a:rPr lang="da-DK" sz="1600" dirty="0"/>
+              <a:t>Henrik som Scrum master med ansvar for bl.a.:</a:t>
+            </a:r>
+          </a:p>
+          <a:p>
+            <a:pPr lvl="1">
+              <a:lnSpc>
+                <a:spcPct val="150000"/>
+              </a:lnSpc>
+            </a:pPr>
             <a:r>
               <a:rPr lang="da-DK" dirty="0"/>
-              <a:t>Funktionelle / Ikke funktionelle krav</a:t>
-            </a:r>
-          </a:p>
-          <a:p>
+              <a:t>Koordinering, opgavefordeling, Code Review, opfølgning og sikre gruppens fremdrift</a:t>
+            </a:r>
+          </a:p>
+          <a:p>
+            <a:pPr>
+              <a:lnSpc>
+                <a:spcPct val="150000"/>
+              </a:lnSpc>
+            </a:pPr>
+            <a:r>
+              <a:rPr lang="da-DK" sz="1600" dirty="0"/>
+              <a:t>Jan (Underviser) som Product Owner:</a:t>
+            </a:r>
+          </a:p>
+          <a:p>
+            <a:pPr lvl="1">
+              <a:lnSpc>
+                <a:spcPct val="150000"/>
+              </a:lnSpc>
+            </a:pPr>
             <a:r>
               <a:rPr lang="da-DK" dirty="0"/>
-              <a:t>FURPS+</a:t>
-            </a:r>
-          </a:p>
-          <a:p>
+              <a:t>Interne vurderinger, kravafklaring</a:t>
+            </a:r>
+          </a:p>
+          <a:p>
+            <a:pPr>
+              <a:lnSpc>
+                <a:spcPct val="150000"/>
+              </a:lnSpc>
+            </a:pPr>
+            <a:r>
+              <a:rPr lang="da-DK" sz="1600" dirty="0"/>
+              <a:t>Arbejdet agilt og anvendt centrale Scrum-elementer som:</a:t>
+            </a:r>
+          </a:p>
+          <a:p>
+            <a:pPr lvl="1">
+              <a:lnSpc>
+                <a:spcPct val="150000"/>
+              </a:lnSpc>
+            </a:pPr>
             <a:r>
               <a:rPr lang="da-DK" dirty="0"/>
-              <a:t>Prioriteringer via </a:t>
-            </a:r>
-            <a:r>
-              <a:rPr lang="da-DK" dirty="0" err="1"/>
-              <a:t>MoSCoW</a:t>
-            </a:r>
-            <a:endParaRPr lang="da-DK" dirty="0"/>
+              <a:t>Product Backlog, Sprints, Sprint Planning, Daily Stand-ups, Sprint Review og Sprint Retrospective</a:t>
+            </a:r>
+          </a:p>
+          <a:p>
+            <a:pPr>
+              <a:lnSpc>
+                <a:spcPct val="150000"/>
+              </a:lnSpc>
+            </a:pPr>
+            <a:r>
+              <a:rPr lang="da-DK" sz="1600" dirty="0"/>
+              <a:t>Case-krav nedbrudt i:</a:t>
+            </a:r>
+          </a:p>
+          <a:p>
+            <a:pPr lvl="1">
+              <a:lnSpc>
+                <a:spcPct val="150000"/>
+              </a:lnSpc>
+            </a:pPr>
+            <a:r>
+              <a:rPr lang="da-DK" dirty="0"/>
+              <a:t>Epics, Features, User Stories og Tasks</a:t>
+            </a:r>
           </a:p>
         </p:txBody>
       </p:sp>
     </p:spTree>
     <p:extLst>
       <p:ext uri="{BB962C8B-B14F-4D97-AF65-F5344CB8AC3E}">
-        <p14:creationId xmlns:p14="http://schemas.microsoft.com/office/powerpoint/2010/main" val="2955145419"/>
+        <p14:creationId xmlns:p14="http://schemas.microsoft.com/office/powerpoint/2010/main" val="213061080"/>
       </p:ext>
     </p:extLst>
   </p:cSld>
@@ -6407,7 +8255,7 @@
           <p:cNvPr id="2" name="Titel 1">
             <a:extLst>
               <a:ext uri="{FF2B5EF4-FFF2-40B4-BE49-F238E27FC236}">
-                <a16:creationId xmlns:a16="http://schemas.microsoft.com/office/drawing/2014/main" id="{1C5E7783-FDC2-1ED8-8703-7884A86C5DDC}"/>
+                <a16:creationId xmlns:a16="http://schemas.microsoft.com/office/drawing/2014/main" id="{9C8AF69A-073F-3441-6BCA-0334D89DF793}"/>
               </a:ext>
             </a:extLst>
           </p:cNvPr>
@@ -6420,27 +8268,29 @@
         </p:nvSpPr>
         <p:spPr/>
         <p:txBody>
-          <a:bodyPr/>
-          <a:lstStyle/>
-          <a:p>
-            <a:r>
-              <a:rPr lang="da-DK" dirty="0"/>
-              <a:t>Arkitektur og systemdesign</a:t>
-            </a:r>
-          </a:p>
-        </p:txBody>
-      </p:sp>
-      <p:sp>
-        <p:nvSpPr>
-          <p:cNvPr id="12" name="Pladsholder til indhold 9">
+          <a:bodyPr>
+            <a:normAutofit/>
+          </a:bodyPr>
+          <a:lstStyle/>
+          <a:p>
+            <a:r>
+              <a:rPr lang="da-DK" sz="4000" dirty="0"/>
+              <a:t>Scrum-processen</a:t>
+            </a:r>
+          </a:p>
+        </p:txBody>
+      </p:sp>
+      <p:sp>
+        <p:nvSpPr>
+          <p:cNvPr id="3" name="Pladsholder til indhold 2">
             <a:extLst>
               <a:ext uri="{FF2B5EF4-FFF2-40B4-BE49-F238E27FC236}">
-                <a16:creationId xmlns:a16="http://schemas.microsoft.com/office/drawing/2014/main" id="{8F2A9D6B-0B78-55A1-0A96-FFB558A12FE5}"/>
+                <a16:creationId xmlns:a16="http://schemas.microsoft.com/office/drawing/2014/main" id="{03D544FB-7216-BFF8-F05B-29EB4E653C9E}"/>
               </a:ext>
             </a:extLst>
           </p:cNvPr>
           <p:cNvSpPr>
-            <a:spLocks/>
+            <a:spLocks noGrp="1"/>
           </p:cNvSpPr>
           <p:nvPr>
             <p:ph idx="1"/>
@@ -6448,51 +8298,92 @@
         </p:nvSpPr>
         <p:spPr>
           <a:xfrm>
-            <a:off x="677334" y="1663211"/>
-            <a:ext cx="8596668" cy="3880773"/>
+            <a:off x="677334" y="1930400"/>
+            <a:ext cx="8596668" cy="4927599"/>
           </a:xfrm>
         </p:spPr>
         <p:txBody>
           <a:bodyPr/>
           <a:lstStyle/>
           <a:p>
-            <a:r>
-              <a:rPr lang="da-DK" dirty="0" err="1"/>
-              <a:t>Use</a:t>
-            </a:r>
+            <a:pPr>
+              <a:lnSpc>
+                <a:spcPct val="150000"/>
+              </a:lnSpc>
+            </a:pPr>
+            <a:r>
+              <a:rPr lang="da-DK" sz="1600" dirty="0"/>
+              <a:t>Metoden er tilpasset vores individuelles behov, arbejdsform og geografiske forhold</a:t>
+            </a:r>
+          </a:p>
+          <a:p>
+            <a:pPr>
+              <a:lnSpc>
+                <a:spcPct val="150000"/>
+              </a:lnSpc>
+            </a:pPr>
+            <a:r>
+              <a:rPr lang="da-DK" sz="1600" dirty="0"/>
+              <a:t>Iterative udviklingsarbejde er struktureret gennem:</a:t>
+            </a:r>
+          </a:p>
+          <a:p>
+            <a:pPr lvl="1">
+              <a:lnSpc>
+                <a:spcPct val="150000"/>
+              </a:lnSpc>
+            </a:pPr>
             <a:r>
               <a:rPr lang="da-DK" dirty="0"/>
-              <a:t> case diagram</a:t>
+              <a:t>Sprints: 6 sprints af 1 uges varighed</a:t>
+            </a:r>
+          </a:p>
+          <a:p>
+            <a:pPr lvl="1">
+              <a:lnSpc>
+                <a:spcPct val="150000"/>
+              </a:lnSpc>
+            </a:pPr>
+            <a:r>
+              <a:rPr lang="da-DK" dirty="0"/>
+              <a:t>Sprint Planning: Hver mandag ved fysisk fremmøde</a:t>
+            </a:r>
+          </a:p>
+          <a:p>
+            <a:pPr lvl="1">
+              <a:lnSpc>
+                <a:spcPct val="150000"/>
+              </a:lnSpc>
+            </a:pPr>
+            <a:r>
+              <a:rPr lang="da-DK" dirty="0"/>
+              <a:t>Daily Stand-ups: Hver morgen kl. 9 over Discord</a:t>
+            </a:r>
+          </a:p>
+          <a:p>
+            <a:pPr lvl="1">
+              <a:lnSpc>
+                <a:spcPct val="150000"/>
+              </a:lnSpc>
+            </a:pPr>
+            <a:r>
+              <a:rPr lang="da-DK" dirty="0"/>
+              <a:t>Sprint Review og Retrospective: Hver fredag ved fysisk fremmøde</a:t>
+            </a:r>
+          </a:p>
+          <a:p>
+            <a:pPr lvl="1">
+              <a:lnSpc>
+                <a:spcPct val="150000"/>
+              </a:lnSpc>
+            </a:pPr>
+            <a:r>
+              <a:rPr lang="da-DK" dirty="0"/>
+              <a:t>1.1 Samtaler: Afholdt af Henrik hver fredag ved fysisk fremmøde</a:t>
             </a:r>
           </a:p>
           <a:p>
             <a:pPr lvl="1"/>
-            <a:r>
-              <a:rPr lang="da-DK" dirty="0">
-                <a:hlinkClick r:id="rId2" action="ppaction://hlinkfile"/>
-              </a:rPr>
-              <a:t>Link</a:t>
-            </a:r>
-            <a:endParaRPr lang="da-DK" dirty="0"/>
-          </a:p>
-          <a:p>
-            <a:pPr lvl="1"/>
-            <a:endParaRPr lang="da-DK" dirty="0"/>
-          </a:p>
-          <a:p>
-            <a:r>
-              <a:rPr lang="da-DK" dirty="0"/>
-              <a:t>Klasse diagram</a:t>
-            </a:r>
-          </a:p>
-          <a:p>
-            <a:pPr lvl="1"/>
-            <a:r>
-              <a:rPr lang="da-DK" dirty="0">
-                <a:hlinkClick r:id="rId3" action="ppaction://hlinkfile"/>
-              </a:rPr>
-              <a:t>Link</a:t>
-            </a:r>
             <a:endParaRPr lang="da-DK" dirty="0"/>
           </a:p>
         </p:txBody>
@@ -6500,7 +8391,7 @@
     </p:spTree>
     <p:extLst>
       <p:ext uri="{BB962C8B-B14F-4D97-AF65-F5344CB8AC3E}">
-        <p14:creationId xmlns:p14="http://schemas.microsoft.com/office/powerpoint/2010/main" val="1244457280"/>
+        <p14:creationId xmlns:p14="http://schemas.microsoft.com/office/powerpoint/2010/main" val="3366515933"/>
       </p:ext>
     </p:extLst>
   </p:cSld>
@@ -6532,7 +8423,7 @@
           <p:cNvPr id="2" name="Titel 1">
             <a:extLst>
               <a:ext uri="{FF2B5EF4-FFF2-40B4-BE49-F238E27FC236}">
-                <a16:creationId xmlns:a16="http://schemas.microsoft.com/office/drawing/2014/main" id="{28A9CEA7-05E9-4B4D-7B78-FD1B6DA474C1}"/>
+                <a16:creationId xmlns:a16="http://schemas.microsoft.com/office/drawing/2014/main" id="{9E74DE2C-1FF1-2B30-6BDF-99CC119A900C}"/>
               </a:ext>
             </a:extLst>
           </p:cNvPr>
@@ -6549,9 +8440,10 @@
           <a:lstStyle/>
           <a:p>
             <a:r>
-              <a:rPr lang="da-DK" dirty="0"/>
-              <a:t>Konklusion og Perspektivering</a:t>
-            </a:r>
+              <a:rPr lang="da-DK" sz="4000" dirty="0"/>
+              <a:t>Forretningsanalyse</a:t>
+            </a:r>
+            <a:endParaRPr lang="da-DK" dirty="0"/>
           </a:p>
         </p:txBody>
       </p:sp>
@@ -6560,7 +8452,7 @@
           <p:cNvPr id="3" name="Pladsholder til indhold 2">
             <a:extLst>
               <a:ext uri="{FF2B5EF4-FFF2-40B4-BE49-F238E27FC236}">
-                <a16:creationId xmlns:a16="http://schemas.microsoft.com/office/drawing/2014/main" id="{1686E3D8-7134-4F38-B308-059D6A10A227}"/>
+                <a16:creationId xmlns:a16="http://schemas.microsoft.com/office/drawing/2014/main" id="{AA0FD022-F7C8-9F14-ACEC-751922ED85AA}"/>
               </a:ext>
             </a:extLst>
           </p:cNvPr>
@@ -6571,108 +8463,114 @@
             <p:ph idx="1"/>
           </p:nvPr>
         </p:nvSpPr>
-        <p:spPr/>
+        <p:spPr>
+          <a:xfrm>
+            <a:off x="677334" y="1481222"/>
+            <a:ext cx="8596668" cy="4927600"/>
+          </a:xfrm>
+        </p:spPr>
         <p:txBody>
           <a:bodyPr>
-            <a:normAutofit fontScale="92500" lnSpcReduction="20000"/>
+            <a:normAutofit/>
           </a:bodyPr>
           <a:lstStyle/>
           <a:p>
             <a:r>
+              <a:rPr lang="da-DK" sz="1600" dirty="0"/>
+              <a:t>AS-IS-analyse</a:t>
+            </a:r>
+          </a:p>
+          <a:p>
+            <a:pPr lvl="1"/>
+            <a:r>
               <a:rPr lang="da-DK" dirty="0"/>
-              <a:t>Projektet resulterer i et fungerende grundsystem</a:t>
-            </a:r>
-          </a:p>
-          <a:p>
-            <a:pPr marL="0" indent="0">
-              <a:buNone/>
-            </a:pPr>
-            <a:endParaRPr lang="da-DK" dirty="0"/>
-          </a:p>
-          <a:p>
+              <a:t>Identificere deres nuværende arbejdsproces og centrale udfordringer</a:t>
+            </a:r>
+          </a:p>
+          <a:p>
+            <a:r>
+              <a:rPr lang="da-DK" sz="1600" dirty="0"/>
+              <a:t>TO-BE-analyse</a:t>
+            </a:r>
+          </a:p>
+          <a:p>
+            <a:pPr lvl="1"/>
             <a:r>
               <a:rPr lang="da-DK" dirty="0"/>
-              <a:t>Oplagt videreudvikling</a:t>
+              <a:t>Beskrive, hvordan et digitalt administrationssystem kan understøtte en mere sammenhængende og effektiv fremtidig arbejdsproces.</a:t>
+            </a:r>
+          </a:p>
+          <a:p>
+            <a:r>
+              <a:rPr lang="da-DK" sz="1600" dirty="0"/>
+              <a:t>SWOT-analyse</a:t>
             </a:r>
           </a:p>
           <a:p>
             <a:pPr lvl="1"/>
             <a:r>
               <a:rPr lang="da-DK" dirty="0"/>
-              <a:t>Liste problemer</a:t>
+              <a:t>Identificere interne styrker og svagheder samt eksterne muligheder og trusler</a:t>
+            </a:r>
+          </a:p>
+          <a:p>
+            <a:r>
+              <a:rPr lang="da-DK" sz="1600" dirty="0"/>
+              <a:t>Interessentanalyse</a:t>
             </a:r>
           </a:p>
           <a:p>
             <a:pPr lvl="1"/>
             <a:r>
               <a:rPr lang="da-DK" dirty="0"/>
-              <a:t>Query simplificering</a:t>
+              <a:t>Centrale aktører og deres behov identificeres og vurderes</a:t>
+            </a:r>
+          </a:p>
+          <a:p>
+            <a:r>
+              <a:rPr lang="da-DK" sz="1600" dirty="0"/>
+              <a:t>Double Diamond</a:t>
             </a:r>
           </a:p>
           <a:p>
             <a:pPr lvl="1"/>
             <a:r>
               <a:rPr lang="da-DK" dirty="0"/>
-              <a:t>Rapport feature</a:t>
+              <a:t>Anvendt som supplerende refleksionsramme med faserne:</a:t>
             </a:r>
           </a:p>
           <a:p>
             <a:pPr lvl="1"/>
             <a:r>
               <a:rPr lang="da-DK" dirty="0" err="1"/>
-              <a:t>Strongly</a:t>
+              <a:t>Discover</a:t>
             </a:r>
             <a:r>
               <a:rPr lang="da-DK" dirty="0"/>
-              <a:t> </a:t>
+              <a:t>, </a:t>
             </a:r>
             <a:r>
               <a:rPr lang="da-DK" dirty="0" err="1"/>
-              <a:t>typed</a:t>
+              <a:t>Define</a:t>
             </a:r>
             <a:r>
               <a:rPr lang="da-DK" dirty="0"/>
-              <a:t> </a:t>
+              <a:t>, </a:t>
             </a:r>
             <a:r>
               <a:rPr lang="da-DK" dirty="0" err="1"/>
-              <a:t>ID’s</a:t>
-            </a:r>
-            <a:endParaRPr lang="da-DK" dirty="0"/>
+              <a:t>Develop</a:t>
+            </a:r>
+            <a:r>
+              <a:rPr lang="da-DK" dirty="0"/>
+              <a:t> og Deliver</a:t>
+            </a:r>
           </a:p>
           <a:p>
             <a:pPr lvl="1"/>
             <a:r>
               <a:rPr lang="da-DK" dirty="0"/>
-              <a:t>EF Factory</a:t>
-            </a:r>
-          </a:p>
-          <a:p>
-            <a:pPr lvl="1"/>
-            <a:r>
-              <a:rPr lang="da-DK" dirty="0"/>
-              <a:t>Grøn IT</a:t>
-            </a:r>
-          </a:p>
-          <a:p>
-            <a:pPr lvl="1"/>
-            <a:r>
-              <a:rPr lang="da-DK" dirty="0"/>
-              <a:t>IT </a:t>
-            </a:r>
-            <a:r>
-              <a:rPr lang="da-DK" dirty="0" err="1"/>
-              <a:t>Governance</a:t>
-            </a:r>
-            <a:endParaRPr lang="da-DK" dirty="0"/>
-          </a:p>
-          <a:p>
-            <a:endParaRPr lang="da-DK" dirty="0"/>
-          </a:p>
-          <a:p>
-            <a:r>
-              <a:rPr lang="da-DK" dirty="0"/>
-              <a:t>Processen – Ris og Ros</a:t>
+              <a:t>Synliggøre sammenhængen mellem de identificerede problemer og den udviklede løsning</a:t>
             </a:r>
           </a:p>
         </p:txBody>
@@ -6680,7 +8578,369 @@
     </p:spTree>
     <p:extLst>
       <p:ext uri="{BB962C8B-B14F-4D97-AF65-F5344CB8AC3E}">
-        <p14:creationId xmlns:p14="http://schemas.microsoft.com/office/powerpoint/2010/main" val="960325152"/>
+        <p14:creationId xmlns:p14="http://schemas.microsoft.com/office/powerpoint/2010/main" val="2205776646"/>
+      </p:ext>
+    </p:extLst>
+  </p:cSld>
+  <p:clrMapOvr>
+    <a:masterClrMapping/>
+  </p:clrMapOvr>
+</p:sld>
+</file>
+
+<file path=ppt/slides/slide8.xml><?xml version="1.0" encoding="utf-8"?>
+<p:sld xmlns:a="http://schemas.openxmlformats.org/drawingml/2006/main" xmlns:r="http://schemas.openxmlformats.org/officeDocument/2006/relationships" xmlns:p="http://schemas.openxmlformats.org/presentationml/2006/main">
+  <p:cSld>
+    <p:spTree>
+      <p:nvGrpSpPr>
+        <p:cNvPr id="1" name=""/>
+        <p:cNvGrpSpPr/>
+        <p:nvPr/>
+      </p:nvGrpSpPr>
+      <p:grpSpPr>
+        <a:xfrm>
+          <a:off x="0" y="0"/>
+          <a:ext cx="0" cy="0"/>
+          <a:chOff x="0" y="0"/>
+          <a:chExt cx="0" cy="0"/>
+        </a:xfrm>
+      </p:grpSpPr>
+      <p:sp>
+        <p:nvSpPr>
+          <p:cNvPr id="2" name="Titel 1">
+            <a:extLst>
+              <a:ext uri="{FF2B5EF4-FFF2-40B4-BE49-F238E27FC236}">
+                <a16:creationId xmlns:a16="http://schemas.microsoft.com/office/drawing/2014/main" id="{9B588A41-528B-7C5D-5BE6-72A8DEF3ADF6}"/>
+              </a:ext>
+            </a:extLst>
+          </p:cNvPr>
+          <p:cNvSpPr>
+            <a:spLocks noGrp="1"/>
+          </p:cNvSpPr>
+          <p:nvPr>
+            <p:ph type="title"/>
+          </p:nvPr>
+        </p:nvSpPr>
+        <p:spPr/>
+        <p:txBody>
+          <a:bodyPr/>
+          <a:lstStyle/>
+          <a:p>
+            <a:r>
+              <a:rPr lang="da-DK" sz="4000" dirty="0"/>
+              <a:t>Kravspecifikation</a:t>
+            </a:r>
+            <a:endParaRPr lang="da-DK" dirty="0"/>
+          </a:p>
+        </p:txBody>
+      </p:sp>
+      <p:sp>
+        <p:nvSpPr>
+          <p:cNvPr id="3" name="Pladsholder til indhold 2">
+            <a:extLst>
+              <a:ext uri="{FF2B5EF4-FFF2-40B4-BE49-F238E27FC236}">
+                <a16:creationId xmlns:a16="http://schemas.microsoft.com/office/drawing/2014/main" id="{85CB8F36-4FA0-7C8A-0674-711CABA23C38}"/>
+              </a:ext>
+            </a:extLst>
+          </p:cNvPr>
+          <p:cNvSpPr>
+            <a:spLocks noGrp="1"/>
+          </p:cNvSpPr>
+          <p:nvPr>
+            <p:ph idx="1"/>
+          </p:nvPr>
+        </p:nvSpPr>
+        <p:spPr>
+          <a:xfrm>
+            <a:off x="677334" y="1497265"/>
+            <a:ext cx="8596668" cy="4927600"/>
+          </a:xfrm>
+        </p:spPr>
+        <p:txBody>
+          <a:bodyPr>
+            <a:normAutofit/>
+          </a:bodyPr>
+          <a:lstStyle/>
+          <a:p>
+            <a:pPr>
+              <a:lnSpc>
+                <a:spcPct val="150000"/>
+              </a:lnSpc>
+            </a:pPr>
+            <a:r>
+              <a:rPr lang="da-DK" sz="1600" dirty="0"/>
+              <a:t>Struktureret kravarbejdet i</a:t>
+            </a:r>
+          </a:p>
+          <a:p>
+            <a:pPr lvl="1">
+              <a:lnSpc>
+                <a:spcPct val="150000"/>
+              </a:lnSpc>
+            </a:pPr>
+            <a:r>
+              <a:rPr lang="da-DK" dirty="0"/>
+              <a:t>Funktionelle krav:</a:t>
+            </a:r>
+          </a:p>
+          <a:p>
+            <a:pPr lvl="2">
+              <a:lnSpc>
+                <a:spcPct val="150000"/>
+              </a:lnSpc>
+            </a:pPr>
+            <a:r>
+              <a:rPr lang="da-DK" sz="1600" dirty="0"/>
+              <a:t>Handlinger systemet skal kunne understøtte</a:t>
+            </a:r>
+          </a:p>
+          <a:p>
+            <a:pPr lvl="3">
+              <a:lnSpc>
+                <a:spcPct val="150000"/>
+              </a:lnSpc>
+            </a:pPr>
+            <a:r>
+              <a:rPr lang="da-DK" sz="1600" dirty="0"/>
+              <a:t>F.eks. bookinghåndtering og kunderegistrering</a:t>
+            </a:r>
+          </a:p>
+          <a:p>
+            <a:pPr lvl="1">
+              <a:lnSpc>
+                <a:spcPct val="150000"/>
+              </a:lnSpc>
+            </a:pPr>
+            <a:r>
+              <a:rPr lang="da-DK" dirty="0"/>
+              <a:t>Ikke funktionelle krav:</a:t>
+            </a:r>
+          </a:p>
+          <a:p>
+            <a:pPr lvl="2">
+              <a:lnSpc>
+                <a:spcPct val="150000"/>
+              </a:lnSpc>
+            </a:pPr>
+            <a:r>
+              <a:rPr lang="da-DK" sz="1600" dirty="0"/>
+              <a:t>Løsningens kvalitetsmæssige egenskaber</a:t>
+            </a:r>
+          </a:p>
+          <a:p>
+            <a:pPr lvl="3">
+              <a:lnSpc>
+                <a:spcPct val="150000"/>
+              </a:lnSpc>
+            </a:pPr>
+            <a:r>
+              <a:rPr lang="da-DK" sz="1600" dirty="0"/>
+              <a:t>F.eks. Brugervenlighed og testbarhed</a:t>
+            </a:r>
+          </a:p>
+          <a:p>
+            <a:pPr>
+              <a:lnSpc>
+                <a:spcPct val="150000"/>
+              </a:lnSpc>
+            </a:pPr>
+            <a:r>
+              <a:rPr lang="da-DK" sz="1600" dirty="0"/>
+              <a:t>Kategoriseret kravene med FURPS+ </a:t>
+            </a:r>
+          </a:p>
+          <a:p>
+            <a:pPr>
+              <a:lnSpc>
+                <a:spcPct val="150000"/>
+              </a:lnSpc>
+            </a:pPr>
+            <a:r>
+              <a:rPr lang="da-DK" sz="1600" dirty="0"/>
+              <a:t>Prioriteret kravene med </a:t>
+            </a:r>
+            <a:r>
+              <a:rPr lang="da-DK" sz="1600" dirty="0" err="1"/>
+              <a:t>MoSCoW</a:t>
+            </a:r>
+            <a:endParaRPr lang="da-DK" sz="1600" dirty="0"/>
+          </a:p>
+          <a:p>
+            <a:pPr lvl="1">
+              <a:lnSpc>
+                <a:spcPct val="150000"/>
+              </a:lnSpc>
+            </a:pPr>
+            <a:r>
+              <a:rPr lang="da-DK" dirty="0"/>
+              <a:t>Sikre fokus på de mest centrale funktioner</a:t>
+            </a:r>
+          </a:p>
+        </p:txBody>
+      </p:sp>
+    </p:spTree>
+    <p:extLst>
+      <p:ext uri="{BB962C8B-B14F-4D97-AF65-F5344CB8AC3E}">
+        <p14:creationId xmlns:p14="http://schemas.microsoft.com/office/powerpoint/2010/main" val="2955145419"/>
+      </p:ext>
+    </p:extLst>
+  </p:cSld>
+  <p:clrMapOvr>
+    <a:masterClrMapping/>
+  </p:clrMapOvr>
+</p:sld>
+</file>
+
+<file path=ppt/slides/slide9.xml><?xml version="1.0" encoding="utf-8"?>
+<p:sld xmlns:a="http://schemas.openxmlformats.org/drawingml/2006/main" xmlns:r="http://schemas.openxmlformats.org/officeDocument/2006/relationships" xmlns:p="http://schemas.openxmlformats.org/presentationml/2006/main">
+  <p:cSld>
+    <p:spTree>
+      <p:nvGrpSpPr>
+        <p:cNvPr id="1" name=""/>
+        <p:cNvGrpSpPr/>
+        <p:nvPr/>
+      </p:nvGrpSpPr>
+      <p:grpSpPr>
+        <a:xfrm>
+          <a:off x="0" y="0"/>
+          <a:ext cx="0" cy="0"/>
+          <a:chOff x="0" y="0"/>
+          <a:chExt cx="0" cy="0"/>
+        </a:xfrm>
+      </p:grpSpPr>
+      <p:sp>
+        <p:nvSpPr>
+          <p:cNvPr id="2" name="Titel 1">
+            <a:extLst>
+              <a:ext uri="{FF2B5EF4-FFF2-40B4-BE49-F238E27FC236}">
+                <a16:creationId xmlns:a16="http://schemas.microsoft.com/office/drawing/2014/main" id="{1C5E7783-FDC2-1ED8-8703-7884A86C5DDC}"/>
+              </a:ext>
+            </a:extLst>
+          </p:cNvPr>
+          <p:cNvSpPr>
+            <a:spLocks noGrp="1"/>
+          </p:cNvSpPr>
+          <p:nvPr>
+            <p:ph type="title"/>
+          </p:nvPr>
+        </p:nvSpPr>
+        <p:spPr/>
+        <p:txBody>
+          <a:bodyPr/>
+          <a:lstStyle/>
+          <a:p>
+            <a:r>
+              <a:rPr lang="da-DK" dirty="0"/>
+              <a:t>Diagrammer</a:t>
+            </a:r>
+          </a:p>
+        </p:txBody>
+      </p:sp>
+      <p:sp>
+        <p:nvSpPr>
+          <p:cNvPr id="12" name="Pladsholder til indhold 9">
+            <a:extLst>
+              <a:ext uri="{FF2B5EF4-FFF2-40B4-BE49-F238E27FC236}">
+                <a16:creationId xmlns:a16="http://schemas.microsoft.com/office/drawing/2014/main" id="{8F2A9D6B-0B78-55A1-0A96-FFB558A12FE5}"/>
+              </a:ext>
+            </a:extLst>
+          </p:cNvPr>
+          <p:cNvSpPr>
+            <a:spLocks noGrp="1"/>
+          </p:cNvSpPr>
+          <p:nvPr>
+            <p:ph idx="1"/>
+          </p:nvPr>
+        </p:nvSpPr>
+        <p:spPr>
+          <a:xfrm>
+            <a:off x="677334" y="1930400"/>
+            <a:ext cx="8596668" cy="4927600"/>
+          </a:xfrm>
+        </p:spPr>
+        <p:txBody>
+          <a:bodyPr>
+            <a:normAutofit/>
+          </a:bodyPr>
+          <a:lstStyle/>
+          <a:p>
+            <a:pPr>
+              <a:lnSpc>
+                <a:spcPct val="150000"/>
+              </a:lnSpc>
+            </a:pPr>
+            <a:r>
+              <a:rPr lang="da-DK" dirty="0"/>
+              <a:t>Use case-diagram</a:t>
+            </a:r>
+          </a:p>
+          <a:p>
+            <a:pPr lvl="1">
+              <a:lnSpc>
+                <a:spcPct val="150000"/>
+              </a:lnSpc>
+            </a:pPr>
+            <a:r>
+              <a:rPr lang="da-DK" sz="1800" dirty="0"/>
+              <a:t>Synliggøre systemets centrale funktioner set fra receptionistens perspektiv</a:t>
+            </a:r>
+          </a:p>
+          <a:p>
+            <a:pPr lvl="1">
+              <a:lnSpc>
+                <a:spcPct val="150000"/>
+              </a:lnSpc>
+            </a:pPr>
+            <a:r>
+              <a:rPr lang="da-DK" sz="1800" dirty="0">
+                <a:hlinkClick r:id="rId3" action="ppaction://hlinkfile"/>
+              </a:rPr>
+              <a:t>Link</a:t>
+            </a:r>
+            <a:endParaRPr lang="da-DK" sz="1800" dirty="0"/>
+          </a:p>
+          <a:p>
+            <a:pPr>
+              <a:lnSpc>
+                <a:spcPct val="150000"/>
+              </a:lnSpc>
+            </a:pPr>
+            <a:r>
+              <a:rPr lang="da-DK" dirty="0"/>
+              <a:t>Klassediagram</a:t>
+            </a:r>
+          </a:p>
+          <a:p>
+            <a:pPr lvl="1">
+              <a:lnSpc>
+                <a:spcPct val="150000"/>
+              </a:lnSpc>
+            </a:pPr>
+            <a:r>
+              <a:rPr lang="da-DK" sz="1800" dirty="0"/>
+              <a:t>Synliggøre systemets centrale domæneobjekter og deres relationer</a:t>
+            </a:r>
+          </a:p>
+          <a:p>
+            <a:pPr lvl="1">
+              <a:lnSpc>
+                <a:spcPct val="150000"/>
+              </a:lnSpc>
+            </a:pPr>
+            <a:r>
+              <a:rPr lang="da-DK" sz="1800" dirty="0">
+                <a:hlinkClick r:id="rId4" action="ppaction://hlinkfile"/>
+              </a:rPr>
+              <a:t>Link</a:t>
+            </a:r>
+            <a:endParaRPr lang="da-DK" sz="1800" dirty="0"/>
+          </a:p>
+        </p:txBody>
+      </p:sp>
+    </p:spTree>
+    <p:extLst>
+      <p:ext uri="{BB962C8B-B14F-4D97-AF65-F5344CB8AC3E}">
+        <p14:creationId xmlns:p14="http://schemas.microsoft.com/office/powerpoint/2010/main" val="1244457280"/>
       </p:ext>
     </p:extLst>
   </p:cSld>
@@ -6945,4 +9205,319 @@
     </a:ext>
   </a:extLst>
 </a:theme>
+</file>
+
+<file path=ppt/theme/theme2.xml><?xml version="1.0" encoding="utf-8"?>
+<a:theme xmlns:a="http://schemas.openxmlformats.org/drawingml/2006/main" name="Office-tema">
+  <a:themeElements>
+    <a:clrScheme name="Office">
+      <a:dk1>
+        <a:sysClr val="windowText" lastClr="000000"/>
+      </a:dk1>
+      <a:lt1>
+        <a:sysClr val="window" lastClr="FFFFFF"/>
+      </a:lt1>
+      <a:dk2>
+        <a:srgbClr val="0E2841"/>
+      </a:dk2>
+      <a:lt2>
+        <a:srgbClr val="E8E8E8"/>
+      </a:lt2>
+      <a:accent1>
+        <a:srgbClr val="156082"/>
+      </a:accent1>
+      <a:accent2>
+        <a:srgbClr val="E97132"/>
+      </a:accent2>
+      <a:accent3>
+        <a:srgbClr val="196B24"/>
+      </a:accent3>
+      <a:accent4>
+        <a:srgbClr val="0F9ED5"/>
+      </a:accent4>
+      <a:accent5>
+        <a:srgbClr val="A02B93"/>
+      </a:accent5>
+      <a:accent6>
+        <a:srgbClr val="4EA72E"/>
+      </a:accent6>
+      <a:hlink>
+        <a:srgbClr val="467886"/>
+      </a:hlink>
+      <a:folHlink>
+        <a:srgbClr val="96607D"/>
+      </a:folHlink>
+    </a:clrScheme>
+    <a:fontScheme name="Office">
+      <a:majorFont>
+        <a:latin typeface="Aptos Display" panose="02110004020202020204"/>
+        <a:ea typeface=""/>
+        <a:cs typeface=""/>
+        <a:font script="Jpan" typeface="游ゴシック Light"/>
+        <a:font script="Hang" typeface="맑은 고딕"/>
+        <a:font script="Hans" typeface="等线 Light"/>
+        <a:font script="Hant" typeface="新細明體"/>
+        <a:font script="Arab" typeface="Times New Roman"/>
+        <a:font script="Hebr" typeface="Times New Roman"/>
+        <a:font script="Thai" typeface="Angsana New"/>
+        <a:font script="Ethi" typeface="Nyala"/>
+        <a:font script="Beng" typeface="Vrinda"/>
+        <a:font script="Gujr" typeface="Shruti"/>
+        <a:font script="Khmr" typeface="MoolBoran"/>
+        <a:font script="Knda" typeface="Tunga"/>
+        <a:font script="Guru" typeface="Raavi"/>
+        <a:font script="Cans" typeface="Euphemia"/>
+        <a:font script="Cher" typeface="Plantagenet Cherokee"/>
+        <a:font script="Yiii" typeface="Microsoft Yi Baiti"/>
+        <a:font script="Tibt" typeface="Microsoft Himalaya"/>
+        <a:font script="Thaa" typeface="MV Boli"/>
+        <a:font script="Deva" typeface="Mangal"/>
+        <a:font script="Telu" typeface="Gautami"/>
+        <a:font script="Taml" typeface="Latha"/>
+        <a:font script="Syrc" typeface="Estrangelo Edessa"/>
+        <a:font script="Orya" typeface="Kalinga"/>
+        <a:font script="Mlym" typeface="Kartika"/>
+        <a:font script="Laoo" typeface="DokChampa"/>
+        <a:font script="Sinh" typeface="Iskoola Pota"/>
+        <a:font script="Mong" typeface="Mongolian Baiti"/>
+        <a:font script="Viet" typeface="Times New Roman"/>
+        <a:font script="Uigh" typeface="Microsoft Uighur"/>
+        <a:font script="Geor" typeface="Sylfaen"/>
+        <a:font script="Armn" typeface="Arial"/>
+        <a:font script="Bugi" typeface="Leelawadee UI"/>
+        <a:font script="Bopo" typeface="Microsoft JhengHei"/>
+        <a:font script="Java" typeface="Javanese Text"/>
+        <a:font script="Lisu" typeface="Segoe UI"/>
+        <a:font script="Mymr" typeface="Myanmar Text"/>
+        <a:font script="Nkoo" typeface="Ebrima"/>
+        <a:font script="Olck" typeface="Nirmala UI"/>
+        <a:font script="Osma" typeface="Ebrima"/>
+        <a:font script="Phag" typeface="Phagspa"/>
+        <a:font script="Syrn" typeface="Estrangelo Edessa"/>
+        <a:font script="Syrj" typeface="Estrangelo Edessa"/>
+        <a:font script="Syre" typeface="Estrangelo Edessa"/>
+        <a:font script="Sora" typeface="Nirmala UI"/>
+        <a:font script="Tale" typeface="Microsoft Tai Le"/>
+        <a:font script="Talu" typeface="Microsoft New Tai Lue"/>
+        <a:font script="Tfng" typeface="Ebrima"/>
+      </a:majorFont>
+      <a:minorFont>
+        <a:latin typeface="Aptos" panose="02110004020202020204"/>
+        <a:ea typeface=""/>
+        <a:cs typeface=""/>
+        <a:font script="Jpan" typeface="游ゴシック"/>
+        <a:font script="Hang" typeface="맑은 고딕"/>
+        <a:font script="Hans" typeface="等线"/>
+        <a:font script="Hant" typeface="新細明體"/>
+        <a:font script="Arab" typeface="Arial"/>
+        <a:font script="Hebr" typeface="Arial"/>
+        <a:font script="Thai" typeface="Cordia New"/>
+        <a:font script="Ethi" typeface="Nyala"/>
+        <a:font script="Beng" typeface="Vrinda"/>
+        <a:font script="Gujr" typeface="Shruti"/>
+        <a:font script="Khmr" typeface="DaunPenh"/>
+        <a:font script="Knda" typeface="Tunga"/>
+        <a:font script="Guru" typeface="Raavi"/>
+        <a:font script="Cans" typeface="Euphemia"/>
+        <a:font script="Cher" typeface="Plantagenet Cherokee"/>
+        <a:font script="Yiii" typeface="Microsoft Yi Baiti"/>
+        <a:font script="Tibt" typeface="Microsoft Himalaya"/>
+        <a:font script="Thaa" typeface="MV Boli"/>
+        <a:font script="Deva" typeface="Mangal"/>
+        <a:font script="Telu" typeface="Gautami"/>
+        <a:font script="Taml" typeface="Latha"/>
+        <a:font script="Syrc" typeface="Estrangelo Edessa"/>
+        <a:font script="Orya" typeface="Kalinga"/>
+        <a:font script="Mlym" typeface="Kartika"/>
+        <a:font script="Laoo" typeface="DokChampa"/>
+        <a:font script="Sinh" typeface="Iskoola Pota"/>
+        <a:font script="Mong" typeface="Mongolian Baiti"/>
+        <a:font script="Viet" typeface="Arial"/>
+        <a:font script="Uigh" typeface="Microsoft Uighur"/>
+        <a:font script="Geor" typeface="Sylfaen"/>
+        <a:font script="Armn" typeface="Arial"/>
+        <a:font script="Bugi" typeface="Leelawadee UI"/>
+        <a:font script="Bopo" typeface="Microsoft JhengHei"/>
+        <a:font script="Java" typeface="Javanese Text"/>
+        <a:font script="Lisu" typeface="Segoe UI"/>
+        <a:font script="Mymr" typeface="Myanmar Text"/>
+        <a:font script="Nkoo" typeface="Ebrima"/>
+        <a:font script="Olck" typeface="Nirmala UI"/>
+        <a:font script="Osma" typeface="Ebrima"/>
+        <a:font script="Phag" typeface="Phagspa"/>
+        <a:font script="Syrn" typeface="Estrangelo Edessa"/>
+        <a:font script="Syrj" typeface="Estrangelo Edessa"/>
+        <a:font script="Syre" typeface="Estrangelo Edessa"/>
+        <a:font script="Sora" typeface="Nirmala UI"/>
+        <a:font script="Tale" typeface="Microsoft Tai Le"/>
+        <a:font script="Talu" typeface="Microsoft New Tai Lue"/>
+        <a:font script="Tfng" typeface="Ebrima"/>
+      </a:minorFont>
+    </a:fontScheme>
+    <a:fmtScheme name="Office">
+      <a:fillStyleLst>
+        <a:solidFill>
+          <a:schemeClr val="phClr"/>
+        </a:solidFill>
+        <a:gradFill rotWithShape="1">
+          <a:gsLst>
+            <a:gs pos="0">
+              <a:schemeClr val="phClr">
+                <a:lumMod val="110000"/>
+                <a:satMod val="105000"/>
+                <a:tint val="67000"/>
+              </a:schemeClr>
+            </a:gs>
+            <a:gs pos="50000">
+              <a:schemeClr val="phClr">
+                <a:lumMod val="105000"/>
+                <a:satMod val="103000"/>
+                <a:tint val="73000"/>
+              </a:schemeClr>
+            </a:gs>
+            <a:gs pos="100000">
+              <a:schemeClr val="phClr">
+                <a:lumMod val="105000"/>
+                <a:satMod val="109000"/>
+                <a:tint val="81000"/>
+              </a:schemeClr>
+            </a:gs>
+          </a:gsLst>
+          <a:lin ang="5400000" scaled="0"/>
+        </a:gradFill>
+        <a:gradFill rotWithShape="1">
+          <a:gsLst>
+            <a:gs pos="0">
+              <a:schemeClr val="phClr">
+                <a:satMod val="103000"/>
+                <a:lumMod val="102000"/>
+                <a:tint val="94000"/>
+              </a:schemeClr>
+            </a:gs>
+            <a:gs pos="50000">
+              <a:schemeClr val="phClr">
+                <a:satMod val="110000"/>
+                <a:lumMod val="100000"/>
+                <a:shade val="100000"/>
+              </a:schemeClr>
+            </a:gs>
+            <a:gs pos="100000">
+              <a:schemeClr val="phClr">
+                <a:lumMod val="99000"/>
+                <a:satMod val="120000"/>
+                <a:shade val="78000"/>
+              </a:schemeClr>
+            </a:gs>
+          </a:gsLst>
+          <a:lin ang="5400000" scaled="0"/>
+        </a:gradFill>
+      </a:fillStyleLst>
+      <a:lnStyleLst>
+        <a:ln w="12700" cap="flat" cmpd="sng" algn="ctr">
+          <a:solidFill>
+            <a:schemeClr val="phClr"/>
+          </a:solidFill>
+          <a:prstDash val="solid"/>
+          <a:miter lim="800000"/>
+        </a:ln>
+        <a:ln w="19050" cap="flat" cmpd="sng" algn="ctr">
+          <a:solidFill>
+            <a:schemeClr val="phClr"/>
+          </a:solidFill>
+          <a:prstDash val="solid"/>
+          <a:miter lim="800000"/>
+        </a:ln>
+        <a:ln w="25400" cap="flat" cmpd="sng" algn="ctr">
+          <a:solidFill>
+            <a:schemeClr val="phClr"/>
+          </a:solidFill>
+          <a:prstDash val="solid"/>
+          <a:miter lim="800000"/>
+        </a:ln>
+      </a:lnStyleLst>
+      <a:effectStyleLst>
+        <a:effectStyle>
+          <a:effectLst/>
+        </a:effectStyle>
+        <a:effectStyle>
+          <a:effectLst/>
+        </a:effectStyle>
+        <a:effectStyle>
+          <a:effectLst>
+            <a:outerShdw blurRad="57150" dist="19050" dir="5400000" algn="ctr" rotWithShape="0">
+              <a:srgbClr val="000000">
+                <a:alpha val="63000"/>
+              </a:srgbClr>
+            </a:outerShdw>
+          </a:effectLst>
+        </a:effectStyle>
+      </a:effectStyleLst>
+      <a:bgFillStyleLst>
+        <a:solidFill>
+          <a:schemeClr val="phClr"/>
+        </a:solidFill>
+        <a:solidFill>
+          <a:schemeClr val="phClr">
+            <a:tint val="95000"/>
+            <a:satMod val="170000"/>
+          </a:schemeClr>
+        </a:solidFill>
+        <a:gradFill rotWithShape="1">
+          <a:gsLst>
+            <a:gs pos="0">
+              <a:schemeClr val="phClr">
+                <a:tint val="93000"/>
+                <a:satMod val="150000"/>
+                <a:shade val="98000"/>
+                <a:lumMod val="102000"/>
+              </a:schemeClr>
+            </a:gs>
+            <a:gs pos="50000">
+              <a:schemeClr val="phClr">
+                <a:tint val="98000"/>
+                <a:satMod val="130000"/>
+                <a:shade val="90000"/>
+                <a:lumMod val="103000"/>
+              </a:schemeClr>
+            </a:gs>
+            <a:gs pos="100000">
+              <a:schemeClr val="phClr">
+                <a:shade val="63000"/>
+                <a:satMod val="120000"/>
+              </a:schemeClr>
+            </a:gs>
+          </a:gsLst>
+          <a:lin ang="5400000" scaled="0"/>
+        </a:gradFill>
+      </a:bgFillStyleLst>
+    </a:fmtScheme>
+  </a:themeElements>
+  <a:objectDefaults>
+    <a:lnDef>
+      <a:spPr/>
+      <a:bodyPr/>
+      <a:lstStyle/>
+      <a:style>
+        <a:lnRef idx="2">
+          <a:schemeClr val="accent1"/>
+        </a:lnRef>
+        <a:fillRef idx="0">
+          <a:schemeClr val="accent1"/>
+        </a:fillRef>
+        <a:effectRef idx="1">
+          <a:schemeClr val="accent1"/>
+        </a:effectRef>
+        <a:fontRef idx="minor">
+          <a:schemeClr val="tx1"/>
+        </a:fontRef>
+      </a:style>
+    </a:lnDef>
+  </a:objectDefaults>
+  <a:extraClrSchemeLst/>
+  <a:extLst>
+    <a:ext uri="{05A4C25C-085E-4340-85A3-A5531E510DB2}">
+      <thm15:themeFamily xmlns:thm15="http://schemas.microsoft.com/office/thememl/2012/main" name="Office Theme" id="{2E142A2C-CD16-42D6-873A-C26D2A0506FA}" vid="{1BDDFF52-6CD6-40A5-AB3C-68EB2F1E4D0A}"/>
+    </a:ext>
+  </a:extLst>
+</a:theme>
 </file>